--- a/ImageDataCommunityDays2026/UserMaterial/ImageDataCommunityDays2026_FG.pptx
+++ b/ImageDataCommunityDays2026/UserMaterial/ImageDataCommunityDays2026_FG.pptx
@@ -13,6 +13,8 @@
     <p:sldId id="258" r:id="rId8"/>
     <p:sldId id="259" r:id="rId9"/>
     <p:sldId id="260" r:id="rId10"/>
+    <p:sldId id="261" r:id="rId11"/>
+    <p:sldId id="262" r:id="rId12"/>
   </p:sldIdLst>
   <p:sldSz cy="6858000" cx="12192000"/>
   <p:notesSz cx="6858000" cy="9144000"/>
@@ -261,7 +263,7 @@
       </p15:sldGuideLst>
     </p:ext>
     <p:ext uri="GoogleSlidesCustomDataVersion2">
-      <go:slidesCustomData xmlns:go="http://customooxmlschemas.google.com/" r:id="rId11" roundtripDataSignature="AMtx7mi0MTdh8Q7M5J2e3BSAmWrxM+mH9Q=="/>
+      <go:slidesCustomData xmlns:go="http://customooxmlschemas.google.com/" r:id="rId13" roundtripDataSignature="AMtx7miEpOFI1pYr0DWpRGv2B/s1jccj7A=="/>
     </p:ext>
   </p:extLst>
 </p:presentation>
@@ -1177,7 +1179,7 @@
               <a:buNone/>
             </a:pPr>
             <a:fld id="{00000000-1234-1234-1234-123412341234}" type="slidenum">
-              <a:rPr b="0" i="0" lang="en-US" sz="1200" u="none" cap="none" strike="noStrike">
+              <a:rPr b="0" i="0" lang="it-IT" sz="1200" u="none" cap="none" strike="noStrike">
                 <a:solidFill>
                   <a:schemeClr val="dk1"/>
                 </a:solidFill>
@@ -1577,7 +1579,7 @@
               <a:buNone/>
             </a:pPr>
             <a:fld id="{00000000-1234-1234-1234-123412341234}" type="slidenum">
-              <a:rPr lang="en-US"/>
+              <a:rPr lang="it-IT"/>
               <a:t>‹#›</a:t>
             </a:fld>
             <a:endParaRPr/>
@@ -1734,7 +1736,7 @@
               <a:buNone/>
             </a:pPr>
             <a:fld id="{00000000-1234-1234-1234-123412341234}" type="slidenum">
-              <a:rPr lang="en-US"/>
+              <a:rPr lang="it-IT"/>
               <a:t>‹#›</a:t>
             </a:fld>
             <a:endParaRPr/>
@@ -1891,7 +1893,7 @@
               <a:buNone/>
             </a:pPr>
             <a:fld id="{00000000-1234-1234-1234-123412341234}" type="slidenum">
-              <a:rPr lang="en-US"/>
+              <a:rPr lang="it-IT"/>
               <a:t>‹#›</a:t>
             </a:fld>
             <a:endParaRPr/>
@@ -2048,7 +2050,7 @@
               <a:buNone/>
             </a:pPr>
             <a:fld id="{00000000-1234-1234-1234-123412341234}" type="slidenum">
-              <a:rPr lang="en-US"/>
+              <a:rPr lang="it-IT"/>
               <a:t>‹#›</a:t>
             </a:fld>
             <a:endParaRPr/>
@@ -2205,7 +2207,321 @@
               <a:buNone/>
             </a:pPr>
             <a:fld id="{00000000-1234-1234-1234-123412341234}" type="slidenum">
-              <a:rPr lang="en-US"/>
+              <a:rPr lang="it-IT"/>
+              <a:t>‹#›</a:t>
+            </a:fld>
+            <a:endParaRPr/>
+          </a:p>
+        </p:txBody>
+      </p:sp>
+    </p:spTree>
+  </p:cSld>
+  <p:clrMapOvr>
+    <a:masterClrMapping/>
+  </p:clrMapOvr>
+</p:notes>
+</file>
+
+<file path=ppt/notesSlides/notesSlide6.xml><?xml version="1.0" encoding="utf-8"?>
+<p:notes xmlns:a="http://schemas.openxmlformats.org/drawingml/2006/main" xmlns:r="http://schemas.openxmlformats.org/officeDocument/2006/relationships" xmlns:mc="http://schemas.openxmlformats.org/markup-compatibility/2006" xmlns:mv="urn:schemas-microsoft-com:mac:vml" xmlns:p="http://schemas.openxmlformats.org/presentationml/2006/main" xmlns:c="http://schemas.openxmlformats.org/drawingml/2006/chart" xmlns:dgm="http://schemas.openxmlformats.org/drawingml/2006/diagram" xmlns:o="urn:schemas-microsoft-com:office:office" xmlns:v="urn:schemas-microsoft-com:vml" xmlns:pvml="urn:schemas-microsoft-com:office:powerpoint" xmlns:com="http://schemas.openxmlformats.org/drawingml/2006/compatibility" xmlns:p14="http://schemas.microsoft.com/office/powerpoint/2010/main" xmlns:p15="http://schemas.microsoft.com/office/powerpoint/2012/main" xmlns:ahyp="http://schemas.microsoft.com/office/drawing/2018/hyperlinkcolor" showMasterPhAnim="0" showMasterSp="0">
+  <p:cSld>
+    <p:spTree>
+      <p:nvGrpSpPr>
+        <p:cNvPr id="160" name="Shape 160"/>
+        <p:cNvGrpSpPr/>
+        <p:nvPr/>
+      </p:nvGrpSpPr>
+      <p:grpSpPr>
+        <a:xfrm>
+          <a:off x="0" y="0"/>
+          <a:ext cx="0" cy="0"/>
+          <a:chOff x="0" y="0"/>
+          <a:chExt cx="0" cy="0"/>
+        </a:xfrm>
+      </p:grpSpPr>
+      <p:sp>
+        <p:nvSpPr>
+          <p:cNvPr id="161" name="Google Shape;161;p6:notes"/>
+          <p:cNvSpPr/>
+          <p:nvPr>
+            <p:ph idx="2" type="sldImg"/>
+          </p:nvPr>
+        </p:nvSpPr>
+        <p:spPr>
+          <a:xfrm>
+            <a:off x="685800" y="1143000"/>
+            <a:ext cx="5486400" cy="3086100"/>
+          </a:xfrm>
+          <a:custGeom>
+            <a:rect b="b" l="l" r="r" t="t"/>
+            <a:pathLst>
+              <a:path extrusionOk="0" h="120000" w="120000">
+                <a:moveTo>
+                  <a:pt x="0" y="0"/>
+                </a:moveTo>
+                <a:lnTo>
+                  <a:pt x="120000" y="0"/>
+                </a:lnTo>
+                <a:lnTo>
+                  <a:pt x="120000" y="120000"/>
+                </a:lnTo>
+                <a:lnTo>
+                  <a:pt x="0" y="120000"/>
+                </a:lnTo>
+                <a:close/>
+              </a:path>
+            </a:pathLst>
+          </a:custGeom>
+          <a:noFill/>
+          <a:ln cap="flat" cmpd="sng" w="12700">
+            <a:solidFill>
+              <a:srgbClr val="000000"/>
+            </a:solidFill>
+            <a:prstDash val="solid"/>
+            <a:round/>
+            <a:headEnd len="sm" w="sm" type="none"/>
+            <a:tailEnd len="sm" w="sm" type="none"/>
+          </a:ln>
+        </p:spPr>
+      </p:sp>
+      <p:sp>
+        <p:nvSpPr>
+          <p:cNvPr id="162" name="Google Shape;162;p6:notes"/>
+          <p:cNvSpPr txBox="1"/>
+          <p:nvPr>
+            <p:ph idx="1" type="body"/>
+          </p:nvPr>
+        </p:nvSpPr>
+        <p:spPr>
+          <a:xfrm>
+            <a:off x="685800" y="4400550"/>
+            <a:ext cx="5486400" cy="3600450"/>
+          </a:xfrm>
+          <a:prstGeom prst="rect">
+            <a:avLst/>
+          </a:prstGeom>
+          <a:noFill/>
+          <a:ln>
+            <a:noFill/>
+          </a:ln>
+        </p:spPr>
+        <p:txBody>
+          <a:bodyPr anchorCtr="0" anchor="t" bIns="45700" lIns="91425" spcFirstLastPara="1" rIns="91425" wrap="square" tIns="45700">
+            <a:noAutofit/>
+          </a:bodyPr>
+          <a:lstStyle/>
+          <a:p>
+            <a:pPr indent="0" lvl="0" marL="0" rtl="0" algn="l">
+              <a:spcBef>
+                <a:spcPts val="0"/>
+              </a:spcBef>
+              <a:spcAft>
+                <a:spcPts val="0"/>
+              </a:spcAft>
+              <a:buNone/>
+            </a:pPr>
+            <a:r>
+              <a:t/>
+            </a:r>
+            <a:endParaRPr/>
+          </a:p>
+        </p:txBody>
+      </p:sp>
+      <p:sp>
+        <p:nvSpPr>
+          <p:cNvPr id="163" name="Google Shape;163;p6:notes"/>
+          <p:cNvSpPr txBox="1"/>
+          <p:nvPr>
+            <p:ph idx="12" type="sldNum"/>
+          </p:nvPr>
+        </p:nvSpPr>
+        <p:spPr>
+          <a:xfrm>
+            <a:off x="3884613" y="8685213"/>
+            <a:ext cx="2971800" cy="458787"/>
+          </a:xfrm>
+          <a:prstGeom prst="rect">
+            <a:avLst/>
+          </a:prstGeom>
+          <a:noFill/>
+          <a:ln>
+            <a:noFill/>
+          </a:ln>
+        </p:spPr>
+        <p:txBody>
+          <a:bodyPr anchorCtr="0" anchor="b" bIns="45700" lIns="91425" spcFirstLastPara="1" rIns="91425" wrap="square" tIns="45700">
+            <a:noAutofit/>
+          </a:bodyPr>
+          <a:lstStyle/>
+          <a:p>
+            <a:pPr indent="0" lvl="0" marL="0" rtl="0" algn="r">
+              <a:spcBef>
+                <a:spcPts val="0"/>
+              </a:spcBef>
+              <a:spcAft>
+                <a:spcPts val="0"/>
+              </a:spcAft>
+              <a:buNone/>
+            </a:pPr>
+            <a:fld id="{00000000-1234-1234-1234-123412341234}" type="slidenum">
+              <a:rPr lang="it-IT"/>
+              <a:t>‹#›</a:t>
+            </a:fld>
+            <a:endParaRPr/>
+          </a:p>
+        </p:txBody>
+      </p:sp>
+    </p:spTree>
+  </p:cSld>
+  <p:clrMapOvr>
+    <a:masterClrMapping/>
+  </p:clrMapOvr>
+</p:notes>
+</file>
+
+<file path=ppt/notesSlides/notesSlide7.xml><?xml version="1.0" encoding="utf-8"?>
+<p:notes xmlns:a="http://schemas.openxmlformats.org/drawingml/2006/main" xmlns:r="http://schemas.openxmlformats.org/officeDocument/2006/relationships" xmlns:mc="http://schemas.openxmlformats.org/markup-compatibility/2006" xmlns:mv="urn:schemas-microsoft-com:mac:vml" xmlns:p="http://schemas.openxmlformats.org/presentationml/2006/main" xmlns:c="http://schemas.openxmlformats.org/drawingml/2006/chart" xmlns:dgm="http://schemas.openxmlformats.org/drawingml/2006/diagram" xmlns:o="urn:schemas-microsoft-com:office:office" xmlns:v="urn:schemas-microsoft-com:vml" xmlns:pvml="urn:schemas-microsoft-com:office:powerpoint" xmlns:com="http://schemas.openxmlformats.org/drawingml/2006/compatibility" xmlns:p14="http://schemas.microsoft.com/office/powerpoint/2010/main" xmlns:p15="http://schemas.microsoft.com/office/powerpoint/2012/main" xmlns:ahyp="http://schemas.microsoft.com/office/drawing/2018/hyperlinkcolor" showMasterPhAnim="0" showMasterSp="0">
+  <p:cSld>
+    <p:spTree>
+      <p:nvGrpSpPr>
+        <p:cNvPr id="176" name="Shape 176"/>
+        <p:cNvGrpSpPr/>
+        <p:nvPr/>
+      </p:nvGrpSpPr>
+      <p:grpSpPr>
+        <a:xfrm>
+          <a:off x="0" y="0"/>
+          <a:ext cx="0" cy="0"/>
+          <a:chOff x="0" y="0"/>
+          <a:chExt cx="0" cy="0"/>
+        </a:xfrm>
+      </p:grpSpPr>
+      <p:sp>
+        <p:nvSpPr>
+          <p:cNvPr id="177" name="Google Shape;177;p7:notes"/>
+          <p:cNvSpPr/>
+          <p:nvPr>
+            <p:ph idx="2" type="sldImg"/>
+          </p:nvPr>
+        </p:nvSpPr>
+        <p:spPr>
+          <a:xfrm>
+            <a:off x="685800" y="1143000"/>
+            <a:ext cx="5486400" cy="3086100"/>
+          </a:xfrm>
+          <a:custGeom>
+            <a:rect b="b" l="l" r="r" t="t"/>
+            <a:pathLst>
+              <a:path extrusionOk="0" h="120000" w="120000">
+                <a:moveTo>
+                  <a:pt x="0" y="0"/>
+                </a:moveTo>
+                <a:lnTo>
+                  <a:pt x="120000" y="0"/>
+                </a:lnTo>
+                <a:lnTo>
+                  <a:pt x="120000" y="120000"/>
+                </a:lnTo>
+                <a:lnTo>
+                  <a:pt x="0" y="120000"/>
+                </a:lnTo>
+                <a:close/>
+              </a:path>
+            </a:pathLst>
+          </a:custGeom>
+          <a:noFill/>
+          <a:ln cap="flat" cmpd="sng" w="12700">
+            <a:solidFill>
+              <a:srgbClr val="000000"/>
+            </a:solidFill>
+            <a:prstDash val="solid"/>
+            <a:round/>
+            <a:headEnd len="sm" w="sm" type="none"/>
+            <a:tailEnd len="sm" w="sm" type="none"/>
+          </a:ln>
+        </p:spPr>
+      </p:sp>
+      <p:sp>
+        <p:nvSpPr>
+          <p:cNvPr id="178" name="Google Shape;178;p7:notes"/>
+          <p:cNvSpPr txBox="1"/>
+          <p:nvPr>
+            <p:ph idx="1" type="body"/>
+          </p:nvPr>
+        </p:nvSpPr>
+        <p:spPr>
+          <a:xfrm>
+            <a:off x="685800" y="4400550"/>
+            <a:ext cx="5486400" cy="3600450"/>
+          </a:xfrm>
+          <a:prstGeom prst="rect">
+            <a:avLst/>
+          </a:prstGeom>
+          <a:noFill/>
+          <a:ln>
+            <a:noFill/>
+          </a:ln>
+        </p:spPr>
+        <p:txBody>
+          <a:bodyPr anchorCtr="0" anchor="t" bIns="45700" lIns="91425" spcFirstLastPara="1" rIns="91425" wrap="square" tIns="45700">
+            <a:noAutofit/>
+          </a:bodyPr>
+          <a:lstStyle/>
+          <a:p>
+            <a:pPr indent="0" lvl="0" marL="0" rtl="0" algn="l">
+              <a:spcBef>
+                <a:spcPts val="0"/>
+              </a:spcBef>
+              <a:spcAft>
+                <a:spcPts val="0"/>
+              </a:spcAft>
+              <a:buNone/>
+            </a:pPr>
+            <a:r>
+              <a:t/>
+            </a:r>
+            <a:endParaRPr/>
+          </a:p>
+        </p:txBody>
+      </p:sp>
+      <p:sp>
+        <p:nvSpPr>
+          <p:cNvPr id="179" name="Google Shape;179;p7:notes"/>
+          <p:cNvSpPr txBox="1"/>
+          <p:nvPr>
+            <p:ph idx="12" type="sldNum"/>
+          </p:nvPr>
+        </p:nvSpPr>
+        <p:spPr>
+          <a:xfrm>
+            <a:off x="3884613" y="8685213"/>
+            <a:ext cx="2971800" cy="458787"/>
+          </a:xfrm>
+          <a:prstGeom prst="rect">
+            <a:avLst/>
+          </a:prstGeom>
+          <a:noFill/>
+          <a:ln>
+            <a:noFill/>
+          </a:ln>
+        </p:spPr>
+        <p:txBody>
+          <a:bodyPr anchorCtr="0" anchor="b" bIns="45700" lIns="91425" spcFirstLastPara="1" rIns="91425" wrap="square" tIns="45700">
+            <a:noAutofit/>
+          </a:bodyPr>
+          <a:lstStyle/>
+          <a:p>
+            <a:pPr indent="0" lvl="0" marL="0" rtl="0" algn="r">
+              <a:spcBef>
+                <a:spcPts val="0"/>
+              </a:spcBef>
+              <a:spcAft>
+                <a:spcPts val="0"/>
+              </a:spcAft>
+              <a:buNone/>
+            </a:pPr>
+            <a:fld id="{00000000-1234-1234-1234-123412341234}" type="slidenum">
+              <a:rPr lang="it-IT"/>
               <a:t>‹#›</a:t>
             </a:fld>
             <a:endParaRPr/>
@@ -2239,7 +2555,7 @@
       </p:grpSpPr>
       <p:sp>
         <p:nvSpPr>
-          <p:cNvPr id="16" name="Google Shape;16;p7"/>
+          <p:cNvPr id="16" name="Google Shape;16;p9"/>
           <p:cNvSpPr txBox="1"/>
           <p:nvPr>
             <p:ph type="ctrTitle"/>
@@ -2375,7 +2691,7 @@
       </p:sp>
       <p:sp>
         <p:nvSpPr>
-          <p:cNvPr id="17" name="Google Shape;17;p7"/>
+          <p:cNvPr id="17" name="Google Shape;17;p9"/>
           <p:cNvSpPr txBox="1"/>
           <p:nvPr>
             <p:ph idx="1" type="subTitle"/>
@@ -2558,7 +2874,7 @@
       </p:sp>
       <p:sp>
         <p:nvSpPr>
-          <p:cNvPr id="18" name="Google Shape;18;p7"/>
+          <p:cNvPr id="18" name="Google Shape;18;p9"/>
           <p:cNvSpPr txBox="1"/>
           <p:nvPr>
             <p:ph idx="10" type="dt"/>
@@ -2687,7 +3003,7 @@
       </p:sp>
       <p:sp>
         <p:nvSpPr>
-          <p:cNvPr id="19" name="Google Shape;19;p7"/>
+          <p:cNvPr id="19" name="Google Shape;19;p9"/>
           <p:cNvSpPr txBox="1"/>
           <p:nvPr>
             <p:ph idx="11" type="ftr"/>
@@ -2816,7 +3132,7 @@
       </p:sp>
       <p:sp>
         <p:nvSpPr>
-          <p:cNvPr id="20" name="Google Shape;20;p7"/>
+          <p:cNvPr id="20" name="Google Shape;20;p9"/>
           <p:cNvSpPr txBox="1"/>
           <p:nvPr>
             <p:ph idx="12" type="sldNum"/>
@@ -2915,7 +3231,7 @@
               <a:buNone/>
             </a:pPr>
             <a:fld id="{00000000-1234-1234-1234-123412341234}" type="slidenum">
-              <a:rPr lang="en-US"/>
+              <a:rPr lang="it-IT"/>
               <a:t>‹#›</a:t>
             </a:fld>
             <a:endParaRPr/>
@@ -2949,7 +3265,7 @@
       </p:grpSpPr>
       <p:sp>
         <p:nvSpPr>
-          <p:cNvPr id="73" name="Google Shape;73;p16"/>
+          <p:cNvPr id="73" name="Google Shape;73;p18"/>
           <p:cNvSpPr txBox="1"/>
           <p:nvPr>
             <p:ph type="title"/>
@@ -3084,7 +3400,7 @@
       </p:sp>
       <p:sp>
         <p:nvSpPr>
-          <p:cNvPr id="74" name="Google Shape;74;p16"/>
+          <p:cNvPr id="74" name="Google Shape;74;p18"/>
           <p:cNvSpPr txBox="1"/>
           <p:nvPr>
             <p:ph idx="1" type="body"/>
@@ -3267,7 +3583,7 @@
       </p:sp>
       <p:sp>
         <p:nvSpPr>
-          <p:cNvPr id="75" name="Google Shape;75;p16"/>
+          <p:cNvPr id="75" name="Google Shape;75;p18"/>
           <p:cNvSpPr txBox="1"/>
           <p:nvPr>
             <p:ph idx="10" type="dt"/>
@@ -3396,7 +3712,7 @@
       </p:sp>
       <p:sp>
         <p:nvSpPr>
-          <p:cNvPr id="76" name="Google Shape;76;p16"/>
+          <p:cNvPr id="76" name="Google Shape;76;p18"/>
           <p:cNvSpPr txBox="1"/>
           <p:nvPr>
             <p:ph idx="11" type="ftr"/>
@@ -3525,7 +3841,7 @@
       </p:sp>
       <p:sp>
         <p:nvSpPr>
-          <p:cNvPr id="77" name="Google Shape;77;p16"/>
+          <p:cNvPr id="77" name="Google Shape;77;p18"/>
           <p:cNvSpPr txBox="1"/>
           <p:nvPr>
             <p:ph idx="12" type="sldNum"/>
@@ -3624,7 +3940,7 @@
               <a:buNone/>
             </a:pPr>
             <a:fld id="{00000000-1234-1234-1234-123412341234}" type="slidenum">
-              <a:rPr lang="en-US"/>
+              <a:rPr lang="it-IT"/>
               <a:t>‹#›</a:t>
             </a:fld>
             <a:endParaRPr/>
@@ -3658,7 +3974,7 @@
       </p:grpSpPr>
       <p:sp>
         <p:nvSpPr>
-          <p:cNvPr id="79" name="Google Shape;79;p17"/>
+          <p:cNvPr id="79" name="Google Shape;79;p19"/>
           <p:cNvSpPr txBox="1"/>
           <p:nvPr>
             <p:ph type="title"/>
@@ -3793,7 +4109,7 @@
       </p:sp>
       <p:sp>
         <p:nvSpPr>
-          <p:cNvPr id="80" name="Google Shape;80;p17"/>
+          <p:cNvPr id="80" name="Google Shape;80;p19"/>
           <p:cNvSpPr txBox="1"/>
           <p:nvPr>
             <p:ph idx="1" type="body"/>
@@ -3976,7 +4292,7 @@
       </p:sp>
       <p:sp>
         <p:nvSpPr>
-          <p:cNvPr id="81" name="Google Shape;81;p17"/>
+          <p:cNvPr id="81" name="Google Shape;81;p19"/>
           <p:cNvSpPr txBox="1"/>
           <p:nvPr>
             <p:ph idx="10" type="dt"/>
@@ -4105,7 +4421,7 @@
       </p:sp>
       <p:sp>
         <p:nvSpPr>
-          <p:cNvPr id="82" name="Google Shape;82;p17"/>
+          <p:cNvPr id="82" name="Google Shape;82;p19"/>
           <p:cNvSpPr txBox="1"/>
           <p:nvPr>
             <p:ph idx="11" type="ftr"/>
@@ -4234,7 +4550,7 @@
       </p:sp>
       <p:sp>
         <p:nvSpPr>
-          <p:cNvPr id="83" name="Google Shape;83;p17"/>
+          <p:cNvPr id="83" name="Google Shape;83;p19"/>
           <p:cNvSpPr txBox="1"/>
           <p:nvPr>
             <p:ph idx="12" type="sldNum"/>
@@ -4333,7 +4649,7 @@
               <a:buNone/>
             </a:pPr>
             <a:fld id="{00000000-1234-1234-1234-123412341234}" type="slidenum">
-              <a:rPr lang="en-US"/>
+              <a:rPr lang="it-IT"/>
               <a:t>‹#›</a:t>
             </a:fld>
             <a:endParaRPr/>
@@ -4367,7 +4683,7 @@
       </p:grpSpPr>
       <p:sp>
         <p:nvSpPr>
-          <p:cNvPr id="22" name="Google Shape;22;p8"/>
+          <p:cNvPr id="22" name="Google Shape;22;p10"/>
           <p:cNvSpPr txBox="1"/>
           <p:nvPr>
             <p:ph idx="10" type="dt"/>
@@ -4496,7 +4812,7 @@
       </p:sp>
       <p:sp>
         <p:nvSpPr>
-          <p:cNvPr id="23" name="Google Shape;23;p8"/>
+          <p:cNvPr id="23" name="Google Shape;23;p10"/>
           <p:cNvSpPr txBox="1"/>
           <p:nvPr>
             <p:ph idx="11" type="ftr"/>
@@ -4625,7 +4941,7 @@
       </p:sp>
       <p:sp>
         <p:nvSpPr>
-          <p:cNvPr id="24" name="Google Shape;24;p8"/>
+          <p:cNvPr id="24" name="Google Shape;24;p10"/>
           <p:cNvSpPr txBox="1"/>
           <p:nvPr>
             <p:ph idx="12" type="sldNum"/>
@@ -4724,7 +5040,7 @@
               <a:buNone/>
             </a:pPr>
             <a:fld id="{00000000-1234-1234-1234-123412341234}" type="slidenum">
-              <a:rPr lang="en-US"/>
+              <a:rPr lang="it-IT"/>
               <a:t>‹#›</a:t>
             </a:fld>
             <a:endParaRPr/>
@@ -4758,7 +5074,7 @@
       </p:grpSpPr>
       <p:sp>
         <p:nvSpPr>
-          <p:cNvPr id="26" name="Google Shape;26;p9"/>
+          <p:cNvPr id="26" name="Google Shape;26;p11"/>
           <p:cNvSpPr txBox="1"/>
           <p:nvPr>
             <p:ph type="title"/>
@@ -4893,7 +5209,7 @@
       </p:sp>
       <p:sp>
         <p:nvSpPr>
-          <p:cNvPr id="27" name="Google Shape;27;p9"/>
+          <p:cNvPr id="27" name="Google Shape;27;p11"/>
           <p:cNvSpPr txBox="1"/>
           <p:nvPr>
             <p:ph idx="1" type="body"/>
@@ -5076,7 +5392,7 @@
       </p:sp>
       <p:sp>
         <p:nvSpPr>
-          <p:cNvPr id="28" name="Google Shape;28;p9"/>
+          <p:cNvPr id="28" name="Google Shape;28;p11"/>
           <p:cNvSpPr txBox="1"/>
           <p:nvPr>
             <p:ph idx="10" type="dt"/>
@@ -5205,7 +5521,7 @@
       </p:sp>
       <p:sp>
         <p:nvSpPr>
-          <p:cNvPr id="29" name="Google Shape;29;p9"/>
+          <p:cNvPr id="29" name="Google Shape;29;p11"/>
           <p:cNvSpPr txBox="1"/>
           <p:nvPr>
             <p:ph idx="11" type="ftr"/>
@@ -5334,7 +5650,7 @@
       </p:sp>
       <p:sp>
         <p:nvSpPr>
-          <p:cNvPr id="30" name="Google Shape;30;p9"/>
+          <p:cNvPr id="30" name="Google Shape;30;p11"/>
           <p:cNvSpPr txBox="1"/>
           <p:nvPr>
             <p:ph idx="12" type="sldNum"/>
@@ -5433,7 +5749,7 @@
               <a:buNone/>
             </a:pPr>
             <a:fld id="{00000000-1234-1234-1234-123412341234}" type="slidenum">
-              <a:rPr lang="en-US"/>
+              <a:rPr lang="it-IT"/>
               <a:t>‹#›</a:t>
             </a:fld>
             <a:endParaRPr/>
@@ -5467,7 +5783,7 @@
       </p:grpSpPr>
       <p:sp>
         <p:nvSpPr>
-          <p:cNvPr id="32" name="Google Shape;32;p10"/>
+          <p:cNvPr id="32" name="Google Shape;32;p12"/>
           <p:cNvSpPr txBox="1"/>
           <p:nvPr>
             <p:ph type="title"/>
@@ -5603,7 +5919,7 @@
       </p:sp>
       <p:sp>
         <p:nvSpPr>
-          <p:cNvPr id="33" name="Google Shape;33;p10"/>
+          <p:cNvPr id="33" name="Google Shape;33;p12"/>
           <p:cNvSpPr txBox="1"/>
           <p:nvPr>
             <p:ph idx="1" type="body"/>
@@ -5822,7 +6138,7 @@
       </p:sp>
       <p:sp>
         <p:nvSpPr>
-          <p:cNvPr id="34" name="Google Shape;34;p10"/>
+          <p:cNvPr id="34" name="Google Shape;34;p12"/>
           <p:cNvSpPr txBox="1"/>
           <p:nvPr>
             <p:ph idx="10" type="dt"/>
@@ -5951,7 +6267,7 @@
       </p:sp>
       <p:sp>
         <p:nvSpPr>
-          <p:cNvPr id="35" name="Google Shape;35;p10"/>
+          <p:cNvPr id="35" name="Google Shape;35;p12"/>
           <p:cNvSpPr txBox="1"/>
           <p:nvPr>
             <p:ph idx="11" type="ftr"/>
@@ -6080,7 +6396,7 @@
       </p:sp>
       <p:sp>
         <p:nvSpPr>
-          <p:cNvPr id="36" name="Google Shape;36;p10"/>
+          <p:cNvPr id="36" name="Google Shape;36;p12"/>
           <p:cNvSpPr txBox="1"/>
           <p:nvPr>
             <p:ph idx="12" type="sldNum"/>
@@ -6179,7 +6495,7 @@
               <a:buNone/>
             </a:pPr>
             <a:fld id="{00000000-1234-1234-1234-123412341234}" type="slidenum">
-              <a:rPr lang="en-US"/>
+              <a:rPr lang="it-IT"/>
               <a:t>‹#›</a:t>
             </a:fld>
             <a:endParaRPr/>
@@ -6213,7 +6529,7 @@
       </p:grpSpPr>
       <p:sp>
         <p:nvSpPr>
-          <p:cNvPr id="38" name="Google Shape;38;p11"/>
+          <p:cNvPr id="38" name="Google Shape;38;p13"/>
           <p:cNvSpPr txBox="1"/>
           <p:nvPr>
             <p:ph type="title"/>
@@ -6348,7 +6664,7 @@
       </p:sp>
       <p:sp>
         <p:nvSpPr>
-          <p:cNvPr id="39" name="Google Shape;39;p11"/>
+          <p:cNvPr id="39" name="Google Shape;39;p13"/>
           <p:cNvSpPr txBox="1"/>
           <p:nvPr>
             <p:ph idx="1" type="body"/>
@@ -6531,7 +6847,7 @@
       </p:sp>
       <p:sp>
         <p:nvSpPr>
-          <p:cNvPr id="40" name="Google Shape;40;p11"/>
+          <p:cNvPr id="40" name="Google Shape;40;p13"/>
           <p:cNvSpPr txBox="1"/>
           <p:nvPr>
             <p:ph idx="2" type="body"/>
@@ -6714,7 +7030,7 @@
       </p:sp>
       <p:sp>
         <p:nvSpPr>
-          <p:cNvPr id="41" name="Google Shape;41;p11"/>
+          <p:cNvPr id="41" name="Google Shape;41;p13"/>
           <p:cNvSpPr txBox="1"/>
           <p:nvPr>
             <p:ph idx="10" type="dt"/>
@@ -6843,7 +7159,7 @@
       </p:sp>
       <p:sp>
         <p:nvSpPr>
-          <p:cNvPr id="42" name="Google Shape;42;p11"/>
+          <p:cNvPr id="42" name="Google Shape;42;p13"/>
           <p:cNvSpPr txBox="1"/>
           <p:nvPr>
             <p:ph idx="11" type="ftr"/>
@@ -6972,7 +7288,7 @@
       </p:sp>
       <p:sp>
         <p:nvSpPr>
-          <p:cNvPr id="43" name="Google Shape;43;p11"/>
+          <p:cNvPr id="43" name="Google Shape;43;p13"/>
           <p:cNvSpPr txBox="1"/>
           <p:nvPr>
             <p:ph idx="12" type="sldNum"/>
@@ -7071,7 +7387,7 @@
               <a:buNone/>
             </a:pPr>
             <a:fld id="{00000000-1234-1234-1234-123412341234}" type="slidenum">
-              <a:rPr lang="en-US"/>
+              <a:rPr lang="it-IT"/>
               <a:t>‹#›</a:t>
             </a:fld>
             <a:endParaRPr/>
@@ -7105,7 +7421,7 @@
       </p:grpSpPr>
       <p:sp>
         <p:nvSpPr>
-          <p:cNvPr id="45" name="Google Shape;45;p12"/>
+          <p:cNvPr id="45" name="Google Shape;45;p14"/>
           <p:cNvSpPr txBox="1"/>
           <p:nvPr>
             <p:ph type="title"/>
@@ -7240,7 +7556,7 @@
       </p:sp>
       <p:sp>
         <p:nvSpPr>
-          <p:cNvPr id="46" name="Google Shape;46;p12"/>
+          <p:cNvPr id="46" name="Google Shape;46;p14"/>
           <p:cNvSpPr txBox="1"/>
           <p:nvPr>
             <p:ph idx="1" type="body"/>
@@ -7423,7 +7739,7 @@
       </p:sp>
       <p:sp>
         <p:nvSpPr>
-          <p:cNvPr id="47" name="Google Shape;47;p12"/>
+          <p:cNvPr id="47" name="Google Shape;47;p14"/>
           <p:cNvSpPr txBox="1"/>
           <p:nvPr>
             <p:ph idx="2" type="body"/>
@@ -7606,7 +7922,7 @@
       </p:sp>
       <p:sp>
         <p:nvSpPr>
-          <p:cNvPr id="48" name="Google Shape;48;p12"/>
+          <p:cNvPr id="48" name="Google Shape;48;p14"/>
           <p:cNvSpPr txBox="1"/>
           <p:nvPr>
             <p:ph idx="3" type="body"/>
@@ -7789,7 +8105,7 @@
       </p:sp>
       <p:sp>
         <p:nvSpPr>
-          <p:cNvPr id="49" name="Google Shape;49;p12"/>
+          <p:cNvPr id="49" name="Google Shape;49;p14"/>
           <p:cNvSpPr txBox="1"/>
           <p:nvPr>
             <p:ph idx="4" type="body"/>
@@ -7972,7 +8288,7 @@
       </p:sp>
       <p:sp>
         <p:nvSpPr>
-          <p:cNvPr id="50" name="Google Shape;50;p12"/>
+          <p:cNvPr id="50" name="Google Shape;50;p14"/>
           <p:cNvSpPr txBox="1"/>
           <p:nvPr>
             <p:ph idx="10" type="dt"/>
@@ -8101,7 +8417,7 @@
       </p:sp>
       <p:sp>
         <p:nvSpPr>
-          <p:cNvPr id="51" name="Google Shape;51;p12"/>
+          <p:cNvPr id="51" name="Google Shape;51;p14"/>
           <p:cNvSpPr txBox="1"/>
           <p:nvPr>
             <p:ph idx="11" type="ftr"/>
@@ -8230,7 +8546,7 @@
       </p:sp>
       <p:sp>
         <p:nvSpPr>
-          <p:cNvPr id="52" name="Google Shape;52;p12"/>
+          <p:cNvPr id="52" name="Google Shape;52;p14"/>
           <p:cNvSpPr txBox="1"/>
           <p:nvPr>
             <p:ph idx="12" type="sldNum"/>
@@ -8329,7 +8645,7 @@
               <a:buNone/>
             </a:pPr>
             <a:fld id="{00000000-1234-1234-1234-123412341234}" type="slidenum">
-              <a:rPr lang="en-US"/>
+              <a:rPr lang="it-IT"/>
               <a:t>‹#›</a:t>
             </a:fld>
             <a:endParaRPr/>
@@ -8363,7 +8679,7 @@
       </p:grpSpPr>
       <p:sp>
         <p:nvSpPr>
-          <p:cNvPr id="54" name="Google Shape;54;p13"/>
+          <p:cNvPr id="54" name="Google Shape;54;p15"/>
           <p:cNvSpPr txBox="1"/>
           <p:nvPr>
             <p:ph type="title"/>
@@ -8498,7 +8814,7 @@
       </p:sp>
       <p:sp>
         <p:nvSpPr>
-          <p:cNvPr id="55" name="Google Shape;55;p13"/>
+          <p:cNvPr id="55" name="Google Shape;55;p15"/>
           <p:cNvSpPr txBox="1"/>
           <p:nvPr>
             <p:ph idx="10" type="dt"/>
@@ -8627,7 +8943,7 @@
       </p:sp>
       <p:sp>
         <p:nvSpPr>
-          <p:cNvPr id="56" name="Google Shape;56;p13"/>
+          <p:cNvPr id="56" name="Google Shape;56;p15"/>
           <p:cNvSpPr txBox="1"/>
           <p:nvPr>
             <p:ph idx="11" type="ftr"/>
@@ -8756,7 +9072,7 @@
       </p:sp>
       <p:sp>
         <p:nvSpPr>
-          <p:cNvPr id="57" name="Google Shape;57;p13"/>
+          <p:cNvPr id="57" name="Google Shape;57;p15"/>
           <p:cNvSpPr txBox="1"/>
           <p:nvPr>
             <p:ph idx="12" type="sldNum"/>
@@ -8855,7 +9171,7 @@
               <a:buNone/>
             </a:pPr>
             <a:fld id="{00000000-1234-1234-1234-123412341234}" type="slidenum">
-              <a:rPr lang="en-US"/>
+              <a:rPr lang="it-IT"/>
               <a:t>‹#›</a:t>
             </a:fld>
             <a:endParaRPr/>
@@ -8889,7 +9205,7 @@
       </p:grpSpPr>
       <p:sp>
         <p:nvSpPr>
-          <p:cNvPr id="59" name="Google Shape;59;p14"/>
+          <p:cNvPr id="59" name="Google Shape;59;p16"/>
           <p:cNvSpPr txBox="1"/>
           <p:nvPr>
             <p:ph type="title"/>
@@ -9025,7 +9341,7 @@
       </p:sp>
       <p:sp>
         <p:nvSpPr>
-          <p:cNvPr id="60" name="Google Shape;60;p14"/>
+          <p:cNvPr id="60" name="Google Shape;60;p16"/>
           <p:cNvSpPr txBox="1"/>
           <p:nvPr>
             <p:ph idx="1" type="body"/>
@@ -9208,7 +9524,7 @@
       </p:sp>
       <p:sp>
         <p:nvSpPr>
-          <p:cNvPr id="61" name="Google Shape;61;p14"/>
+          <p:cNvPr id="61" name="Google Shape;61;p16"/>
           <p:cNvSpPr txBox="1"/>
           <p:nvPr>
             <p:ph idx="2" type="body"/>
@@ -9391,7 +9707,7 @@
       </p:sp>
       <p:sp>
         <p:nvSpPr>
-          <p:cNvPr id="62" name="Google Shape;62;p14"/>
+          <p:cNvPr id="62" name="Google Shape;62;p16"/>
           <p:cNvSpPr txBox="1"/>
           <p:nvPr>
             <p:ph idx="10" type="dt"/>
@@ -9520,7 +9836,7 @@
       </p:sp>
       <p:sp>
         <p:nvSpPr>
-          <p:cNvPr id="63" name="Google Shape;63;p14"/>
+          <p:cNvPr id="63" name="Google Shape;63;p16"/>
           <p:cNvSpPr txBox="1"/>
           <p:nvPr>
             <p:ph idx="11" type="ftr"/>
@@ -9649,7 +9965,7 @@
       </p:sp>
       <p:sp>
         <p:nvSpPr>
-          <p:cNvPr id="64" name="Google Shape;64;p14"/>
+          <p:cNvPr id="64" name="Google Shape;64;p16"/>
           <p:cNvSpPr txBox="1"/>
           <p:nvPr>
             <p:ph idx="12" type="sldNum"/>
@@ -9748,7 +10064,7 @@
               <a:buNone/>
             </a:pPr>
             <a:fld id="{00000000-1234-1234-1234-123412341234}" type="slidenum">
-              <a:rPr lang="en-US"/>
+              <a:rPr lang="it-IT"/>
               <a:t>‹#›</a:t>
             </a:fld>
             <a:endParaRPr/>
@@ -9782,7 +10098,7 @@
       </p:grpSpPr>
       <p:sp>
         <p:nvSpPr>
-          <p:cNvPr id="66" name="Google Shape;66;p15"/>
+          <p:cNvPr id="66" name="Google Shape;66;p17"/>
           <p:cNvSpPr txBox="1"/>
           <p:nvPr>
             <p:ph type="title"/>
@@ -9918,7 +10234,7 @@
       </p:sp>
       <p:sp>
         <p:nvSpPr>
-          <p:cNvPr id="67" name="Google Shape;67;p15"/>
+          <p:cNvPr id="67" name="Google Shape;67;p17"/>
           <p:cNvSpPr/>
           <p:nvPr>
             <p:ph idx="2" type="pic"/>
@@ -9940,7 +10256,7 @@
       </p:sp>
       <p:sp>
         <p:nvSpPr>
-          <p:cNvPr id="68" name="Google Shape;68;p15"/>
+          <p:cNvPr id="68" name="Google Shape;68;p17"/>
           <p:cNvSpPr txBox="1"/>
           <p:nvPr>
             <p:ph idx="1" type="body"/>
@@ -10123,7 +10439,7 @@
       </p:sp>
       <p:sp>
         <p:nvSpPr>
-          <p:cNvPr id="69" name="Google Shape;69;p15"/>
+          <p:cNvPr id="69" name="Google Shape;69;p17"/>
           <p:cNvSpPr txBox="1"/>
           <p:nvPr>
             <p:ph idx="10" type="dt"/>
@@ -10252,7 +10568,7 @@
       </p:sp>
       <p:sp>
         <p:nvSpPr>
-          <p:cNvPr id="70" name="Google Shape;70;p15"/>
+          <p:cNvPr id="70" name="Google Shape;70;p17"/>
           <p:cNvSpPr txBox="1"/>
           <p:nvPr>
             <p:ph idx="11" type="ftr"/>
@@ -10381,7 +10697,7 @@
       </p:sp>
       <p:sp>
         <p:nvSpPr>
-          <p:cNvPr id="71" name="Google Shape;71;p15"/>
+          <p:cNvPr id="71" name="Google Shape;71;p17"/>
           <p:cNvSpPr txBox="1"/>
           <p:nvPr>
             <p:ph idx="12" type="sldNum"/>
@@ -10480,7 +10796,7 @@
               <a:buNone/>
             </a:pPr>
             <a:fld id="{00000000-1234-1234-1234-123412341234}" type="slidenum">
-              <a:rPr lang="en-US"/>
+              <a:rPr lang="it-IT"/>
               <a:t>‹#›</a:t>
             </a:fld>
             <a:endParaRPr/>
@@ -10521,7 +10837,7 @@
       </p:grpSpPr>
       <p:sp>
         <p:nvSpPr>
-          <p:cNvPr id="10" name="Google Shape;10;p6"/>
+          <p:cNvPr id="10" name="Google Shape;10;p8"/>
           <p:cNvSpPr txBox="1"/>
           <p:nvPr>
             <p:ph type="title"/>
@@ -10665,7 +10981,7 @@
       </p:sp>
       <p:sp>
         <p:nvSpPr>
-          <p:cNvPr id="11" name="Google Shape;11;p6"/>
+          <p:cNvPr id="11" name="Google Shape;11;p8"/>
           <p:cNvSpPr txBox="1"/>
           <p:nvPr>
             <p:ph idx="1" type="body"/>
@@ -10929,7 +11245,7 @@
       </p:sp>
       <p:sp>
         <p:nvSpPr>
-          <p:cNvPr id="12" name="Google Shape;12;p6"/>
+          <p:cNvPr id="12" name="Google Shape;12;p8"/>
           <p:cNvSpPr txBox="1"/>
           <p:nvPr>
             <p:ph idx="10" type="dt"/>
@@ -11130,7 +11446,7 @@
       </p:sp>
       <p:sp>
         <p:nvSpPr>
-          <p:cNvPr id="13" name="Google Shape;13;p6"/>
+          <p:cNvPr id="13" name="Google Shape;13;p8"/>
           <p:cNvSpPr txBox="1"/>
           <p:nvPr>
             <p:ph idx="11" type="ftr"/>
@@ -11331,7 +11647,7 @@
       </p:sp>
       <p:sp>
         <p:nvSpPr>
-          <p:cNvPr id="14" name="Google Shape;14;p6"/>
+          <p:cNvPr id="14" name="Google Shape;14;p8"/>
           <p:cNvSpPr txBox="1"/>
           <p:nvPr>
             <p:ph idx="12" type="sldNum"/>
@@ -11502,7 +11818,7 @@
               <a:buNone/>
             </a:pPr>
             <a:fld id="{00000000-1234-1234-1234-123412341234}" type="slidenum">
-              <a:rPr lang="en-US"/>
+              <a:rPr lang="it-IT"/>
               <a:t>‹#›</a:t>
             </a:fld>
             <a:endParaRPr/>
@@ -12358,7 +12674,7 @@
               <a:buNone/>
             </a:pPr>
             <a:r>
-              <a:rPr b="1" i="0" lang="en-US" sz="4800" u="none" cap="none" strike="noStrike">
+              <a:rPr b="1" i="0" lang="it-IT" sz="4800" u="none" cap="none" strike="noStrike">
                 <a:solidFill>
                   <a:srgbClr val="172946"/>
                 </a:solidFill>
@@ -12398,7 +12714,7 @@
               <a:buNone/>
             </a:pPr>
             <a:r>
-              <a:rPr b="1" i="0" lang="en-US" sz="4800" u="none" cap="none" strike="noStrike">
+              <a:rPr b="1" i="0" lang="it-IT" sz="4800" u="none" cap="none" strike="noStrike">
                 <a:solidFill>
                   <a:srgbClr val="172946"/>
                 </a:solidFill>
@@ -12495,7 +12811,7 @@
               <a:buNone/>
             </a:pPr>
             <a:r>
-              <a:rPr b="1" i="0" lang="en-US" sz="2400" u="none" cap="none" strike="noStrike">
+              <a:rPr b="1" i="0" lang="it-IT" sz="2400" u="none" cap="none" strike="noStrike">
                 <a:solidFill>
                   <a:srgbClr val="172946"/>
                 </a:solidFill>
@@ -12693,7 +13009,7 @@
               <a:buNone/>
             </a:pPr>
             <a:r>
-              <a:rPr b="0" i="0" lang="en-US" sz="3600" u="none" cap="none" strike="noStrike">
+              <a:rPr b="0" i="0" lang="it-IT" sz="3600" u="none" cap="none" strike="noStrike">
                 <a:solidFill>
                   <a:srgbClr val="172946"/>
                 </a:solidFill>
@@ -12778,7 +13094,7 @@
               <a:buNone/>
             </a:pPr>
             <a:r>
-              <a:rPr b="0" lang="en-US" sz="1200" u="none">
+              <a:rPr b="0" lang="it-IT" sz="1200" u="none">
                 <a:solidFill>
                   <a:srgbClr val="888888"/>
                 </a:solidFill>
@@ -12836,7 +13152,7 @@
               <a:buNone/>
             </a:pPr>
             <a:r>
-              <a:rPr b="0" lang="en-US" sz="1800" u="none">
+              <a:rPr b="0" lang="it-IT" sz="1800" u="none">
                 <a:solidFill>
                   <a:schemeClr val="dk1"/>
                 </a:solidFill>
@@ -12868,7 +13184,7 @@
               <a:buNone/>
             </a:pPr>
             <a:r>
-              <a:rPr b="0" lang="en-US" sz="1800" u="none">
+              <a:rPr b="0" lang="it-IT" sz="1800" u="none">
                 <a:solidFill>
                   <a:schemeClr val="dk1"/>
                 </a:solidFill>
@@ -12974,8 +13290,8 @@
         </p:nvCxnSpPr>
         <p:spPr>
           <a:xfrm flipH="1">
-            <a:off x="310196" y="744440"/>
-            <a:ext cx="7198200" cy="16200"/>
+            <a:off x="310164" y="744440"/>
+            <a:ext cx="7198232" cy="16185"/>
           </a:xfrm>
           <a:prstGeom prst="straightConnector1">
             <a:avLst/>
@@ -13001,7 +13317,7 @@
         <p:spPr>
           <a:xfrm>
             <a:off x="310403" y="94032"/>
-            <a:ext cx="7733700" cy="646200"/>
+            <a:ext cx="7733831" cy="646331"/>
           </a:xfrm>
           <a:prstGeom prst="rect">
             <a:avLst/>
@@ -13027,7 +13343,7 @@
               <a:buNone/>
             </a:pPr>
             <a:r>
-              <a:rPr lang="en-US" sz="3600">
+              <a:rPr lang="it-IT" sz="3600">
                 <a:solidFill>
                   <a:srgbClr val="172946"/>
                 </a:solidFill>
@@ -13039,7 +13355,7 @@
               <a:t>Download XNAT-PIC</a:t>
             </a:r>
             <a:r>
-              <a:rPr b="1" lang="en-US" sz="3600">
+              <a:rPr b="1" lang="it-IT" sz="3600">
                 <a:solidFill>
                   <a:srgbClr val="172946"/>
                 </a:solidFill>
@@ -13129,13 +13445,13 @@
           <a:blip r:embed="rId3">
             <a:alphaModFix/>
           </a:blip>
-          <a:srcRect b="34560" l="17213" r="17585" t="7763"/>
+          <a:srcRect b="34559" l="17216" r="17582" t="7763"/>
           <a:stretch/>
         </p:blipFill>
         <p:spPr>
           <a:xfrm>
             <a:off x="10982392" y="93620"/>
-            <a:ext cx="1212395" cy="1075777"/>
+            <a:ext cx="1212396" cy="1075776"/>
           </a:xfrm>
           <a:prstGeom prst="rect">
             <a:avLst/>
@@ -13155,7 +13471,7 @@
         <p:spPr>
           <a:xfrm>
             <a:off x="4038600" y="6356350"/>
-            <a:ext cx="4114800" cy="365100"/>
+            <a:ext cx="4114800" cy="365125"/>
           </a:xfrm>
           <a:prstGeom prst="rect">
             <a:avLst/>
@@ -13181,7 +13497,7 @@
               <a:buNone/>
             </a:pPr>
             <a:r>
-              <a:rPr lang="en-US" sz="1200">
+              <a:rPr lang="it-IT" sz="1200">
                 <a:solidFill>
                   <a:srgbClr val="888888"/>
                 </a:solidFill>
@@ -13289,7 +13605,7 @@
         </p:nvSpPr>
         <p:spPr>
           <a:xfrm>
-            <a:off x="7323197" y="2849167"/>
+            <a:off x="7288065" y="2021580"/>
             <a:ext cx="4709700" cy="646500"/>
           </a:xfrm>
           <a:prstGeom prst="rect">
@@ -13316,7 +13632,7 @@
               <a:buNone/>
             </a:pPr>
             <a:r>
-              <a:rPr b="1" lang="en-US" sz="1800">
+              <a:rPr b="1" lang="it-IT" sz="1800">
                 <a:solidFill>
                   <a:schemeClr val="dk1"/>
                 </a:solidFill>
@@ -13328,7 +13644,7 @@
               <a:t>GitHub</a:t>
             </a:r>
             <a:r>
-              <a:rPr lang="en-US" sz="1800">
+              <a:rPr lang="it-IT" sz="1800">
                 <a:solidFill>
                   <a:schemeClr val="dk1"/>
                 </a:solidFill>
@@ -13340,7 +13656,7 @@
               <a:t>: </a:t>
             </a:r>
             <a:r>
-              <a:rPr lang="en-US" sz="1800" u="sng">
+              <a:rPr lang="it-IT" sz="1800" u="sng">
                 <a:solidFill>
                   <a:schemeClr val="hlink"/>
                 </a:solidFill>
@@ -13402,7 +13718,7 @@
         </p:blipFill>
         <p:spPr>
           <a:xfrm flipH="1">
-            <a:off x="6643824" y="2825753"/>
+            <a:off x="6608692" y="1998166"/>
             <a:ext cx="734460" cy="386510"/>
           </a:xfrm>
           <a:prstGeom prst="rect">
@@ -13449,7 +13765,7 @@
               <a:buNone/>
             </a:pPr>
             <a:r>
-              <a:rPr lang="en-US" sz="1800">
+              <a:rPr lang="it-IT" sz="1800">
                 <a:solidFill>
                   <a:schemeClr val="dk1"/>
                 </a:solidFill>
@@ -13581,7 +13897,7 @@
               <a:buNone/>
             </a:pPr>
             <a:r>
-              <a:rPr b="1" lang="en-US" sz="1800">
+              <a:rPr b="1" lang="it-IT" sz="1800">
                 <a:solidFill>
                   <a:srgbClr val="233E6B"/>
                 </a:solidFill>
@@ -13593,7 +13909,7 @@
               <a:t>XNAT-PIC</a:t>
             </a:r>
             <a:r>
-              <a:rPr b="1" i="0" lang="en-US" sz="1800">
+              <a:rPr b="1" i="0" lang="it-IT" sz="1800">
                 <a:solidFill>
                   <a:srgbClr val="233E6B"/>
                 </a:solidFill>
@@ -13654,7 +13970,7 @@
         </p:blipFill>
         <p:spPr>
           <a:xfrm>
-            <a:off x="8868276" y="3353805"/>
+            <a:off x="8895544" y="2774642"/>
             <a:ext cx="1173080" cy="1223211"/>
           </a:xfrm>
           <a:prstGeom prst="rect">
@@ -13752,7 +14068,7 @@
               <a:buNone/>
             </a:pPr>
             <a:r>
-              <a:rPr lang="en-US" sz="3600">
+              <a:rPr lang="it-IT" sz="3600">
                 <a:solidFill>
                   <a:srgbClr val="172946"/>
                 </a:solidFill>
@@ -13764,7 +14080,7 @@
               <a:t>Folder Structure</a:t>
             </a:r>
             <a:r>
-              <a:rPr b="1" lang="en-US" sz="3600">
+              <a:rPr b="1" lang="it-IT" sz="3600">
                 <a:solidFill>
                   <a:srgbClr val="172946"/>
                 </a:solidFill>
@@ -13906,7 +14222,7 @@
               <a:buNone/>
             </a:pPr>
             <a:r>
-              <a:rPr lang="en-US" sz="1200">
+              <a:rPr lang="it-IT" sz="1200">
                 <a:solidFill>
                   <a:srgbClr val="888888"/>
                 </a:solidFill>
@@ -14041,7 +14357,7 @@
               <a:buNone/>
             </a:pPr>
             <a:r>
-              <a:rPr lang="en-US" sz="1800">
+              <a:rPr lang="it-IT" sz="1800">
                 <a:solidFill>
                   <a:schemeClr val="dk1"/>
                 </a:solidFill>
@@ -14091,7 +14407,7 @@
               <a:buNone/>
             </a:pPr>
             <a:r>
-              <a:rPr lang="en-US" sz="2400">
+              <a:rPr lang="it-IT" sz="2400">
                 <a:solidFill>
                   <a:schemeClr val="dk1"/>
                 </a:solidFill>
@@ -14199,7 +14515,7 @@
               <a:buNone/>
             </a:pPr>
             <a:r>
-              <a:rPr lang="en-US" sz="1800">
+              <a:rPr lang="it-IT" sz="1800">
                 <a:solidFill>
                   <a:srgbClr val="233E6B"/>
                 </a:solidFill>
@@ -14211,7 +14527,7 @@
               <a:t>     Project</a:t>
             </a:r>
             <a:r>
-              <a:rPr lang="en-US" sz="1800">
+              <a:rPr lang="it-IT" sz="1800">
                 <a:solidFill>
                   <a:schemeClr val="dk1"/>
                 </a:solidFill>
@@ -14223,7 +14539,7 @@
               <a:t>            </a:t>
             </a:r>
             <a:r>
-              <a:rPr lang="en-US" sz="1800">
+              <a:rPr lang="it-IT" sz="1800">
                 <a:solidFill>
                   <a:srgbClr val="3D3D3D"/>
                 </a:solidFill>
@@ -14235,7 +14551,7 @@
               <a:t>Subject         </a:t>
             </a:r>
             <a:r>
-              <a:rPr lang="en-US" sz="1800">
+              <a:rPr lang="it-IT" sz="1800">
                 <a:solidFill>
                   <a:srgbClr val="233E6B"/>
                 </a:solidFill>
@@ -14247,7 +14563,7 @@
               <a:t>Experiment      </a:t>
             </a:r>
             <a:r>
-              <a:rPr lang="en-US" sz="1800">
+              <a:rPr lang="it-IT" sz="1800">
                 <a:solidFill>
                   <a:srgbClr val="3D3D3D"/>
                 </a:solidFill>
@@ -14259,7 +14575,7 @@
               <a:t>Scan     </a:t>
             </a:r>
             <a:r>
-              <a:rPr lang="en-US" sz="1800">
+              <a:rPr lang="it-IT" sz="1800">
                 <a:solidFill>
                   <a:srgbClr val="233E6B"/>
                 </a:solidFill>
@@ -14666,7 +14982,7 @@
               <a:buNone/>
             </a:pPr>
             <a:r>
-              <a:rPr lang="en-US" sz="3600">
+              <a:rPr lang="it-IT" sz="3600">
                 <a:solidFill>
                   <a:srgbClr val="172946"/>
                 </a:solidFill>
@@ -14678,7 +14994,7 @@
               <a:t>XNAT Login</a:t>
             </a:r>
             <a:r>
-              <a:rPr b="1" lang="en-US" sz="3600">
+              <a:rPr b="1" lang="it-IT" sz="3600">
                 <a:solidFill>
                   <a:srgbClr val="172946"/>
                 </a:solidFill>
@@ -14820,7 +15136,7 @@
               <a:buNone/>
             </a:pPr>
             <a:r>
-              <a:rPr lang="en-US" sz="1200">
+              <a:rPr lang="it-IT" sz="1200">
                 <a:solidFill>
                   <a:srgbClr val="888888"/>
                 </a:solidFill>
@@ -14878,7 +15194,7 @@
               <a:buNone/>
             </a:pPr>
             <a:r>
-              <a:rPr lang="en-US" sz="1800">
+              <a:rPr lang="it-IT" sz="1800">
                 <a:solidFill>
                   <a:schemeClr val="dk1"/>
                 </a:solidFill>
@@ -14928,7 +15244,7 @@
               <a:buNone/>
             </a:pPr>
             <a:r>
-              <a:rPr lang="en-US" sz="1800">
+              <a:rPr lang="it-IT" sz="1800">
                 <a:solidFill>
                   <a:schemeClr val="dk1"/>
                 </a:solidFill>
@@ -15008,7 +15324,7 @@
         <p:spPr>
           <a:xfrm>
             <a:off x="1714500" y="1584157"/>
-            <a:ext cx="6096000" cy="646500"/>
+            <a:ext cx="6096000" cy="646331"/>
           </a:xfrm>
           <a:prstGeom prst="rect">
             <a:avLst/>
@@ -15034,15 +15350,21 @@
               <a:buNone/>
             </a:pPr>
             <a:r>
-              <a:rPr lang="en-US" sz="1800" u="sng">
+              <a:rPr lang="it-IT" sz="1800" u="sng">
                 <a:solidFill>
-                  <a:schemeClr val="hlink"/>
+                  <a:schemeClr val="dk1"/>
                 </a:solidFill>
                 <a:latin typeface="Calibri"/>
                 <a:ea typeface="Calibri"/>
                 <a:cs typeface="Calibri"/>
                 <a:sym typeface="Calibri"/>
-                <a:hlinkClick r:id="rId5"/>
+                <a:hlinkClick r:id="rId5">
+                  <a:extLst>
+                    <a:ext uri="{A12FA001-AC4F-418D-AE19-62706E023703}">
+                      <ahyp:hlinkClr val="tx"/>
+                    </a:ext>
+                  </a:extLst>
+                </a:hlinkClick>
               </a:rPr>
               <a:t>https://eubi-xnat.hpc4ai.unito.it/</a:t>
             </a:r>
@@ -15135,6 +15457,1137 @@
           </a:ln>
         </p:spPr>
       </p:pic>
+    </p:spTree>
+  </p:cSld>
+  <p:clrMapOvr>
+    <a:masterClrMapping/>
+  </p:clrMapOvr>
+</p:sld>
+</file>
+
+<file path=ppt/slides/slide6.xml><?xml version="1.0" encoding="utf-8"?>
+<p:sld xmlns:a="http://schemas.openxmlformats.org/drawingml/2006/main" xmlns:r="http://schemas.openxmlformats.org/officeDocument/2006/relationships" xmlns:mc="http://schemas.openxmlformats.org/markup-compatibility/2006" xmlns:mv="urn:schemas-microsoft-com:mac:vml" xmlns:p="http://schemas.openxmlformats.org/presentationml/2006/main" xmlns:c="http://schemas.openxmlformats.org/drawingml/2006/chart" xmlns:dgm="http://schemas.openxmlformats.org/drawingml/2006/diagram" xmlns:o="urn:schemas-microsoft-com:office:office" xmlns:v="urn:schemas-microsoft-com:vml" xmlns:pvml="urn:schemas-microsoft-com:office:powerpoint" xmlns:com="http://schemas.openxmlformats.org/drawingml/2006/compatibility" xmlns:p14="http://schemas.microsoft.com/office/powerpoint/2010/main" xmlns:p15="http://schemas.microsoft.com/office/powerpoint/2012/main" xmlns:ahyp="http://schemas.microsoft.com/office/drawing/2018/hyperlinkcolor">
+  <p:cSld>
+    <p:spTree>
+      <p:nvGrpSpPr>
+        <p:cNvPr id="164" name="Shape 164"/>
+        <p:cNvGrpSpPr/>
+        <p:nvPr/>
+      </p:nvGrpSpPr>
+      <p:grpSpPr>
+        <a:xfrm>
+          <a:off x="0" y="0"/>
+          <a:ext cx="0" cy="0"/>
+          <a:chOff x="0" y="0"/>
+          <a:chExt cx="0" cy="0"/>
+        </a:xfrm>
+      </p:grpSpPr>
+      <p:cxnSp>
+        <p:nvCxnSpPr>
+          <p:cNvPr id="165" name="Google Shape;165;p6"/>
+          <p:cNvCxnSpPr/>
+          <p:nvPr/>
+        </p:nvCxnSpPr>
+        <p:spPr>
+          <a:xfrm flipH="1">
+            <a:off x="310164" y="744440"/>
+            <a:ext cx="7198232" cy="16185"/>
+          </a:xfrm>
+          <a:prstGeom prst="straightConnector1">
+            <a:avLst/>
+          </a:prstGeom>
+          <a:noFill/>
+          <a:ln cap="flat" cmpd="sng" w="28575">
+            <a:solidFill>
+              <a:srgbClr val="172946"/>
+            </a:solidFill>
+            <a:prstDash val="solid"/>
+            <a:miter lim="800000"/>
+            <a:headEnd len="sm" w="sm" type="none"/>
+            <a:tailEnd len="med" w="med" type="none"/>
+          </a:ln>
+        </p:spPr>
+      </p:cxnSp>
+      <p:sp>
+        <p:nvSpPr>
+          <p:cNvPr id="166" name="Google Shape;166;p6"/>
+          <p:cNvSpPr txBox="1"/>
+          <p:nvPr/>
+        </p:nvSpPr>
+        <p:spPr>
+          <a:xfrm>
+            <a:off x="310403" y="94032"/>
+            <a:ext cx="7733831" cy="646331"/>
+          </a:xfrm>
+          <a:prstGeom prst="rect">
+            <a:avLst/>
+          </a:prstGeom>
+          <a:noFill/>
+          <a:ln>
+            <a:noFill/>
+          </a:ln>
+        </p:spPr>
+        <p:txBody>
+          <a:bodyPr anchorCtr="0" anchor="t" bIns="45700" lIns="91425" spcFirstLastPara="1" rIns="91425" wrap="square" tIns="45700">
+            <a:spAutoFit/>
+          </a:bodyPr>
+          <a:lstStyle/>
+          <a:p>
+            <a:pPr indent="0" lvl="0" marL="0" marR="0" rtl="0" algn="l">
+              <a:spcBef>
+                <a:spcPts val="0"/>
+              </a:spcBef>
+              <a:spcAft>
+                <a:spcPts val="0"/>
+              </a:spcAft>
+              <a:buNone/>
+            </a:pPr>
+            <a:r>
+              <a:rPr lang="it-IT" sz="3600">
+                <a:solidFill>
+                  <a:srgbClr val="172946"/>
+                </a:solidFill>
+                <a:latin typeface="Calibri"/>
+                <a:ea typeface="Calibri"/>
+                <a:cs typeface="Calibri"/>
+                <a:sym typeface="Calibri"/>
+              </a:rPr>
+              <a:t>XNAT Login</a:t>
+            </a:r>
+            <a:r>
+              <a:rPr b="1" lang="it-IT" sz="3600">
+                <a:solidFill>
+                  <a:srgbClr val="172946"/>
+                </a:solidFill>
+                <a:latin typeface="Calibri"/>
+                <a:ea typeface="Calibri"/>
+                <a:cs typeface="Calibri"/>
+                <a:sym typeface="Calibri"/>
+              </a:rPr>
+              <a:t> </a:t>
+            </a:r>
+            <a:endParaRPr sz="1800">
+              <a:solidFill>
+                <a:schemeClr val="dk1"/>
+              </a:solidFill>
+              <a:latin typeface="Calibri"/>
+              <a:ea typeface="Calibri"/>
+              <a:cs typeface="Calibri"/>
+              <a:sym typeface="Calibri"/>
+            </a:endParaRPr>
+          </a:p>
+        </p:txBody>
+      </p:sp>
+      <p:sp>
+        <p:nvSpPr>
+          <p:cNvPr id="167" name="Google Shape;167;p6"/>
+          <p:cNvSpPr/>
+          <p:nvPr/>
+        </p:nvSpPr>
+        <p:spPr>
+          <a:xfrm>
+            <a:off x="9903568" y="1379204"/>
+            <a:ext cx="301767" cy="337525"/>
+          </a:xfrm>
+          <a:prstGeom prst="rect">
+            <a:avLst/>
+          </a:prstGeom>
+          <a:solidFill>
+            <a:schemeClr val="lt1"/>
+          </a:solidFill>
+          <a:ln cap="flat" cmpd="sng" w="38100">
+            <a:solidFill>
+              <a:schemeClr val="lt1"/>
+            </a:solidFill>
+            <a:prstDash val="solid"/>
+            <a:miter lim="800000"/>
+            <a:headEnd len="sm" w="sm" type="none"/>
+            <a:tailEnd len="sm" w="sm" type="none"/>
+          </a:ln>
+        </p:spPr>
+        <p:txBody>
+          <a:bodyPr anchorCtr="0" anchor="ctr" bIns="45700" lIns="91425" spcFirstLastPara="1" rIns="91425" wrap="square" tIns="45700">
+            <a:noAutofit/>
+          </a:bodyPr>
+          <a:lstStyle/>
+          <a:p>
+            <a:pPr indent="0" lvl="0" marL="0" marR="0" rtl="0" algn="ctr">
+              <a:spcBef>
+                <a:spcPts val="0"/>
+              </a:spcBef>
+              <a:spcAft>
+                <a:spcPts val="0"/>
+              </a:spcAft>
+              <a:buNone/>
+            </a:pPr>
+            <a:r>
+              <a:t/>
+            </a:r>
+            <a:endParaRPr sz="1800">
+              <a:solidFill>
+                <a:schemeClr val="lt1"/>
+              </a:solidFill>
+              <a:latin typeface="Calibri"/>
+              <a:ea typeface="Calibri"/>
+              <a:cs typeface="Calibri"/>
+              <a:sym typeface="Calibri"/>
+            </a:endParaRPr>
+          </a:p>
+        </p:txBody>
+      </p:sp>
+      <p:pic>
+        <p:nvPicPr>
+          <p:cNvPr descr="Category: Nodes - Euro-BioImaging" id="168" name="Google Shape;168;p6"/>
+          <p:cNvPicPr preferRelativeResize="0"/>
+          <p:nvPr/>
+        </p:nvPicPr>
+        <p:blipFill rotWithShape="1">
+          <a:blip r:embed="rId3">
+            <a:alphaModFix/>
+          </a:blip>
+          <a:srcRect b="34559" l="17216" r="17582" t="7763"/>
+          <a:stretch/>
+        </p:blipFill>
+        <p:spPr>
+          <a:xfrm>
+            <a:off x="10982392" y="93620"/>
+            <a:ext cx="1212396" cy="1075776"/>
+          </a:xfrm>
+          <a:prstGeom prst="rect">
+            <a:avLst/>
+          </a:prstGeom>
+          <a:noFill/>
+          <a:ln>
+            <a:noFill/>
+          </a:ln>
+        </p:spPr>
+      </p:pic>
+      <p:sp>
+        <p:nvSpPr>
+          <p:cNvPr id="169" name="Google Shape;169;p6"/>
+          <p:cNvSpPr/>
+          <p:nvPr/>
+        </p:nvSpPr>
+        <p:spPr>
+          <a:xfrm>
+            <a:off x="4038600" y="6356350"/>
+            <a:ext cx="4114800" cy="365125"/>
+          </a:xfrm>
+          <a:prstGeom prst="rect">
+            <a:avLst/>
+          </a:prstGeom>
+          <a:noFill/>
+          <a:ln>
+            <a:noFill/>
+          </a:ln>
+        </p:spPr>
+        <p:txBody>
+          <a:bodyPr anchorCtr="0" anchor="ctr" bIns="45700" lIns="91425" spcFirstLastPara="1" rIns="91425" wrap="square" tIns="45700">
+            <a:noAutofit/>
+          </a:bodyPr>
+          <a:lstStyle/>
+          <a:p>
+            <a:pPr indent="0" lvl="0" marL="0" marR="0" rtl="0" algn="ctr">
+              <a:spcBef>
+                <a:spcPts val="0"/>
+              </a:spcBef>
+              <a:spcAft>
+                <a:spcPts val="0"/>
+              </a:spcAft>
+              <a:buNone/>
+            </a:pPr>
+            <a:r>
+              <a:rPr lang="it-IT" sz="1200">
+                <a:solidFill>
+                  <a:srgbClr val="888888"/>
+                </a:solidFill>
+                <a:latin typeface="Calibri"/>
+                <a:ea typeface="Calibri"/>
+                <a:cs typeface="Calibri"/>
+                <a:sym typeface="Calibri"/>
+              </a:rPr>
+              <a:t>francesco.gammaraccio@unito.it</a:t>
+            </a:r>
+            <a:endParaRPr sz="1200">
+              <a:solidFill>
+                <a:srgbClr val="888888"/>
+              </a:solidFill>
+              <a:latin typeface="Calibri"/>
+              <a:ea typeface="Calibri"/>
+              <a:cs typeface="Calibri"/>
+              <a:sym typeface="Calibri"/>
+            </a:endParaRPr>
+          </a:p>
+        </p:txBody>
+      </p:sp>
+      <p:sp>
+        <p:nvSpPr>
+          <p:cNvPr id="170" name="Google Shape;170;p6"/>
+          <p:cNvSpPr txBox="1"/>
+          <p:nvPr/>
+        </p:nvSpPr>
+        <p:spPr>
+          <a:xfrm flipH="1" rot="10800000">
+            <a:off x="1606627" y="9910897"/>
+            <a:ext cx="1303664" cy="58909"/>
+          </a:xfrm>
+          <a:prstGeom prst="rect">
+            <a:avLst/>
+          </a:prstGeom>
+          <a:noFill/>
+          <a:ln>
+            <a:noFill/>
+          </a:ln>
+        </p:spPr>
+        <p:txBody>
+          <a:bodyPr anchorCtr="0" anchor="t" bIns="45700" lIns="91425" spcFirstLastPara="1" rIns="91425" wrap="square" tIns="45700">
+            <a:normAutofit fontScale="25000" lnSpcReduction="20000"/>
+          </a:bodyPr>
+          <a:lstStyle/>
+          <a:p>
+            <a:pPr indent="0" lvl="0" marL="0" marR="0" rtl="0" algn="l">
+              <a:spcBef>
+                <a:spcPts val="0"/>
+              </a:spcBef>
+              <a:spcAft>
+                <a:spcPts val="0"/>
+              </a:spcAft>
+              <a:buNone/>
+            </a:pPr>
+            <a:r>
+              <a:rPr lang="it-IT" sz="1800">
+                <a:solidFill>
+                  <a:schemeClr val="dk1"/>
+                </a:solidFill>
+                <a:latin typeface="Calibri"/>
+                <a:ea typeface="Calibri"/>
+                <a:cs typeface="Calibri"/>
+                <a:sym typeface="Calibri"/>
+              </a:rPr>
+              <a:t>ThePhoto di PhotoAuthor è concessa in licenza secondo CCYYSA.</a:t>
+            </a:r>
+            <a:endParaRPr/>
+          </a:p>
+        </p:txBody>
+      </p:sp>
+      <p:sp>
+        <p:nvSpPr>
+          <p:cNvPr id="171" name="Google Shape;171;p6"/>
+          <p:cNvSpPr txBox="1"/>
+          <p:nvPr/>
+        </p:nvSpPr>
+        <p:spPr>
+          <a:xfrm>
+            <a:off x="310816" y="1062789"/>
+            <a:ext cx="6096000" cy="646331"/>
+          </a:xfrm>
+          <a:prstGeom prst="rect">
+            <a:avLst/>
+          </a:prstGeom>
+          <a:noFill/>
+          <a:ln>
+            <a:noFill/>
+          </a:ln>
+        </p:spPr>
+        <p:txBody>
+          <a:bodyPr anchorCtr="0" anchor="t" bIns="45700" lIns="91425" spcFirstLastPara="1" rIns="91425" wrap="square" tIns="45700">
+            <a:spAutoFit/>
+          </a:bodyPr>
+          <a:lstStyle/>
+          <a:p>
+            <a:pPr indent="0" lvl="0" marL="0" marR="0" rtl="0" algn="l">
+              <a:spcBef>
+                <a:spcPts val="0"/>
+              </a:spcBef>
+              <a:spcAft>
+                <a:spcPts val="0"/>
+              </a:spcAft>
+              <a:buNone/>
+            </a:pPr>
+            <a:r>
+              <a:rPr lang="it-IT" sz="1800">
+                <a:solidFill>
+                  <a:schemeClr val="dk1"/>
+                </a:solidFill>
+                <a:latin typeface="Calibri"/>
+                <a:ea typeface="Calibri"/>
+                <a:cs typeface="Calibri"/>
+                <a:sym typeface="Calibri"/>
+              </a:rPr>
+              <a:t>Use the credentials provided to log in to our XNAT instance.</a:t>
+            </a:r>
+            <a:endParaRPr/>
+          </a:p>
+          <a:p>
+            <a:pPr indent="0" lvl="0" marL="0" marR="0" rtl="0" algn="ctr">
+              <a:spcBef>
+                <a:spcPts val="0"/>
+              </a:spcBef>
+              <a:spcAft>
+                <a:spcPts val="0"/>
+              </a:spcAft>
+              <a:buNone/>
+            </a:pPr>
+            <a:r>
+              <a:t/>
+            </a:r>
+            <a:endParaRPr sz="1800">
+              <a:solidFill>
+                <a:schemeClr val="dk1"/>
+              </a:solidFill>
+              <a:latin typeface="Calibri"/>
+              <a:ea typeface="Calibri"/>
+              <a:cs typeface="Calibri"/>
+              <a:sym typeface="Calibri"/>
+            </a:endParaRPr>
+          </a:p>
+        </p:txBody>
+      </p:sp>
+      <p:pic>
+        <p:nvPicPr>
+          <p:cNvPr descr="Immagine che contiene testo, schermata, Carattere, numero&#10;&#10;Il contenuto generato dall&amp;#39;IA potrebbe non essere corretto." id="172" name="Google Shape;172;p6"/>
+          <p:cNvPicPr preferRelativeResize="0"/>
+          <p:nvPr/>
+        </p:nvPicPr>
+        <p:blipFill rotWithShape="1">
+          <a:blip r:embed="rId4">
+            <a:alphaModFix/>
+          </a:blip>
+          <a:srcRect b="0" l="0" r="0" t="0"/>
+          <a:stretch/>
+        </p:blipFill>
+        <p:spPr>
+          <a:xfrm>
+            <a:off x="647449" y="2271462"/>
+            <a:ext cx="4219575" cy="3257550"/>
+          </a:xfrm>
+          <a:prstGeom prst="rect">
+            <a:avLst/>
+          </a:prstGeom>
+          <a:noFill/>
+          <a:ln cap="flat" cmpd="sng" w="9525">
+            <a:solidFill>
+              <a:srgbClr val="233E6B"/>
+            </a:solidFill>
+            <a:prstDash val="solid"/>
+            <a:round/>
+            <a:headEnd len="sm" w="sm" type="none"/>
+            <a:tailEnd len="sm" w="sm" type="none"/>
+          </a:ln>
+        </p:spPr>
+      </p:pic>
+      <p:sp>
+        <p:nvSpPr>
+          <p:cNvPr id="173" name="Google Shape;173;p6"/>
+          <p:cNvSpPr txBox="1"/>
+          <p:nvPr/>
+        </p:nvSpPr>
+        <p:spPr>
+          <a:xfrm>
+            <a:off x="1714500" y="1584157"/>
+            <a:ext cx="6096000" cy="646331"/>
+          </a:xfrm>
+          <a:prstGeom prst="rect">
+            <a:avLst/>
+          </a:prstGeom>
+          <a:noFill/>
+          <a:ln>
+            <a:noFill/>
+          </a:ln>
+        </p:spPr>
+        <p:txBody>
+          <a:bodyPr anchorCtr="0" anchor="t" bIns="45700" lIns="91425" spcFirstLastPara="1" rIns="91425" wrap="square" tIns="45700">
+            <a:spAutoFit/>
+          </a:bodyPr>
+          <a:lstStyle/>
+          <a:p>
+            <a:pPr indent="0" lvl="0" marL="0" marR="0" rtl="0" algn="l">
+              <a:spcBef>
+                <a:spcPts val="0"/>
+              </a:spcBef>
+              <a:spcAft>
+                <a:spcPts val="0"/>
+              </a:spcAft>
+              <a:buNone/>
+            </a:pPr>
+            <a:r>
+              <a:rPr lang="it-IT" sz="1800" u="sng">
+                <a:solidFill>
+                  <a:schemeClr val="dk1"/>
+                </a:solidFill>
+                <a:latin typeface="Calibri"/>
+                <a:ea typeface="Calibri"/>
+                <a:cs typeface="Calibri"/>
+                <a:sym typeface="Calibri"/>
+                <a:hlinkClick r:id="rId5">
+                  <a:extLst>
+                    <a:ext uri="{A12FA001-AC4F-418D-AE19-62706E023703}">
+                      <ahyp:hlinkClr val="tx"/>
+                    </a:ext>
+                  </a:extLst>
+                </a:hlinkClick>
+              </a:rPr>
+              <a:t>https://eubi-xnat.hpc4ai.unito.it/</a:t>
+            </a:r>
+            <a:endParaRPr sz="1800">
+              <a:solidFill>
+                <a:schemeClr val="dk1"/>
+              </a:solidFill>
+              <a:latin typeface="Calibri"/>
+              <a:ea typeface="Calibri"/>
+              <a:cs typeface="Calibri"/>
+              <a:sym typeface="Calibri"/>
+            </a:endParaRPr>
+          </a:p>
+          <a:p>
+            <a:pPr indent="0" lvl="0" marL="0" marR="0" rtl="0" algn="ctr">
+              <a:spcBef>
+                <a:spcPts val="0"/>
+              </a:spcBef>
+              <a:spcAft>
+                <a:spcPts val="0"/>
+              </a:spcAft>
+              <a:buNone/>
+            </a:pPr>
+            <a:r>
+              <a:t/>
+            </a:r>
+            <a:endParaRPr sz="1800">
+              <a:solidFill>
+                <a:schemeClr val="dk1"/>
+              </a:solidFill>
+              <a:latin typeface="Calibri"/>
+              <a:ea typeface="Calibri"/>
+              <a:cs typeface="Calibri"/>
+              <a:sym typeface="Calibri"/>
+            </a:endParaRPr>
+          </a:p>
+        </p:txBody>
+      </p:sp>
+      <p:pic>
+        <p:nvPicPr>
+          <p:cNvPr descr="Immagine che contiene testo, schermata, Carattere, numero&#10;&#10;Il contenuto generato dall&amp;#39;IA potrebbe non essere corretto." id="174" name="Google Shape;174;p6"/>
+          <p:cNvPicPr preferRelativeResize="0"/>
+          <p:nvPr/>
+        </p:nvPicPr>
+        <p:blipFill rotWithShape="1">
+          <a:blip r:embed="rId6">
+            <a:alphaModFix/>
+          </a:blip>
+          <a:srcRect b="-310" l="0" r="40633" t="74"/>
+          <a:stretch/>
+        </p:blipFill>
+        <p:spPr>
+          <a:xfrm>
+            <a:off x="5245767" y="1467225"/>
+            <a:ext cx="5808810" cy="4086371"/>
+          </a:xfrm>
+          <a:prstGeom prst="rect">
+            <a:avLst/>
+          </a:prstGeom>
+          <a:noFill/>
+          <a:ln>
+            <a:noFill/>
+          </a:ln>
+        </p:spPr>
+      </p:pic>
+      <p:pic>
+        <p:nvPicPr>
+          <p:cNvPr descr="Immagine che contiene Elementi grafici, grafica, design&#10;&#10;Il contenuto generato dall&amp;#39;IA potrebbe non essere corretto." id="175" name="Google Shape;175;p6"/>
+          <p:cNvPicPr preferRelativeResize="0"/>
+          <p:nvPr/>
+        </p:nvPicPr>
+        <p:blipFill rotWithShape="1">
+          <a:blip r:embed="rId7">
+            <a:alphaModFix/>
+          </a:blip>
+          <a:srcRect b="0" l="0" r="0" t="0"/>
+          <a:stretch/>
+        </p:blipFill>
+        <p:spPr>
+          <a:xfrm>
+            <a:off x="471236" y="1471045"/>
+            <a:ext cx="1243264" cy="486911"/>
+          </a:xfrm>
+          <a:prstGeom prst="rect">
+            <a:avLst/>
+          </a:prstGeom>
+          <a:noFill/>
+          <a:ln>
+            <a:noFill/>
+          </a:ln>
+        </p:spPr>
+      </p:pic>
+    </p:spTree>
+  </p:cSld>
+  <p:clrMapOvr>
+    <a:masterClrMapping/>
+  </p:clrMapOvr>
+</p:sld>
+</file>
+
+<file path=ppt/slides/slide7.xml><?xml version="1.0" encoding="utf-8"?>
+<p:sld xmlns:a="http://schemas.openxmlformats.org/drawingml/2006/main" xmlns:r="http://schemas.openxmlformats.org/officeDocument/2006/relationships" xmlns:mc="http://schemas.openxmlformats.org/markup-compatibility/2006" xmlns:mv="urn:schemas-microsoft-com:mac:vml" xmlns:p="http://schemas.openxmlformats.org/presentationml/2006/main" xmlns:c="http://schemas.openxmlformats.org/drawingml/2006/chart" xmlns:dgm="http://schemas.openxmlformats.org/drawingml/2006/diagram" xmlns:o="urn:schemas-microsoft-com:office:office" xmlns:v="urn:schemas-microsoft-com:vml" xmlns:pvml="urn:schemas-microsoft-com:office:powerpoint" xmlns:com="http://schemas.openxmlformats.org/drawingml/2006/compatibility" xmlns:p14="http://schemas.microsoft.com/office/powerpoint/2010/main" xmlns:p15="http://schemas.microsoft.com/office/powerpoint/2012/main" xmlns:ahyp="http://schemas.microsoft.com/office/drawing/2018/hyperlinkcolor">
+  <p:cSld>
+    <p:spTree>
+      <p:nvGrpSpPr>
+        <p:cNvPr id="180" name="Shape 180"/>
+        <p:cNvGrpSpPr/>
+        <p:nvPr/>
+      </p:nvGrpSpPr>
+      <p:grpSpPr>
+        <a:xfrm>
+          <a:off x="0" y="0"/>
+          <a:ext cx="0" cy="0"/>
+          <a:chOff x="0" y="0"/>
+          <a:chExt cx="0" cy="0"/>
+        </a:xfrm>
+      </p:grpSpPr>
+      <p:cxnSp>
+        <p:nvCxnSpPr>
+          <p:cNvPr id="181" name="Google Shape;181;p7"/>
+          <p:cNvCxnSpPr/>
+          <p:nvPr/>
+        </p:nvCxnSpPr>
+        <p:spPr>
+          <a:xfrm flipH="1">
+            <a:off x="310164" y="744440"/>
+            <a:ext cx="7198232" cy="16185"/>
+          </a:xfrm>
+          <a:prstGeom prst="straightConnector1">
+            <a:avLst/>
+          </a:prstGeom>
+          <a:noFill/>
+          <a:ln cap="flat" cmpd="sng" w="28575">
+            <a:solidFill>
+              <a:srgbClr val="172946"/>
+            </a:solidFill>
+            <a:prstDash val="solid"/>
+            <a:miter lim="800000"/>
+            <a:headEnd len="sm" w="sm" type="none"/>
+            <a:tailEnd len="med" w="med" type="none"/>
+          </a:ln>
+        </p:spPr>
+      </p:cxnSp>
+      <p:sp>
+        <p:nvSpPr>
+          <p:cNvPr id="182" name="Google Shape;182;p7"/>
+          <p:cNvSpPr txBox="1"/>
+          <p:nvPr/>
+        </p:nvSpPr>
+        <p:spPr>
+          <a:xfrm>
+            <a:off x="310403" y="94032"/>
+            <a:ext cx="7733831" cy="646331"/>
+          </a:xfrm>
+          <a:prstGeom prst="rect">
+            <a:avLst/>
+          </a:prstGeom>
+          <a:noFill/>
+          <a:ln>
+            <a:noFill/>
+          </a:ln>
+        </p:spPr>
+        <p:txBody>
+          <a:bodyPr anchorCtr="0" anchor="t" bIns="45700" lIns="91425" spcFirstLastPara="1" rIns="91425" wrap="square" tIns="45700">
+            <a:spAutoFit/>
+          </a:bodyPr>
+          <a:lstStyle/>
+          <a:p>
+            <a:pPr indent="0" lvl="0" marL="0" marR="0" rtl="0" algn="l">
+              <a:spcBef>
+                <a:spcPts val="0"/>
+              </a:spcBef>
+              <a:spcAft>
+                <a:spcPts val="0"/>
+              </a:spcAft>
+              <a:buNone/>
+            </a:pPr>
+            <a:r>
+              <a:rPr lang="it-IT" sz="3600">
+                <a:solidFill>
+                  <a:srgbClr val="172946"/>
+                </a:solidFill>
+                <a:latin typeface="Calibri"/>
+                <a:ea typeface="Calibri"/>
+                <a:cs typeface="Calibri"/>
+                <a:sym typeface="Calibri"/>
+              </a:rPr>
+              <a:t>Custom Forms</a:t>
+            </a:r>
+            <a:r>
+              <a:rPr b="1" lang="it-IT" sz="3600">
+                <a:solidFill>
+                  <a:srgbClr val="172946"/>
+                </a:solidFill>
+                <a:latin typeface="Calibri"/>
+                <a:ea typeface="Calibri"/>
+                <a:cs typeface="Calibri"/>
+                <a:sym typeface="Calibri"/>
+              </a:rPr>
+              <a:t> </a:t>
+            </a:r>
+            <a:endParaRPr sz="1800">
+              <a:solidFill>
+                <a:schemeClr val="dk1"/>
+              </a:solidFill>
+              <a:latin typeface="Calibri"/>
+              <a:ea typeface="Calibri"/>
+              <a:cs typeface="Calibri"/>
+              <a:sym typeface="Calibri"/>
+            </a:endParaRPr>
+          </a:p>
+        </p:txBody>
+      </p:sp>
+      <p:sp>
+        <p:nvSpPr>
+          <p:cNvPr id="183" name="Google Shape;183;p7"/>
+          <p:cNvSpPr/>
+          <p:nvPr/>
+        </p:nvSpPr>
+        <p:spPr>
+          <a:xfrm>
+            <a:off x="9903568" y="1379204"/>
+            <a:ext cx="301767" cy="337525"/>
+          </a:xfrm>
+          <a:prstGeom prst="rect">
+            <a:avLst/>
+          </a:prstGeom>
+          <a:solidFill>
+            <a:schemeClr val="lt1"/>
+          </a:solidFill>
+          <a:ln cap="flat" cmpd="sng" w="38100">
+            <a:solidFill>
+              <a:schemeClr val="lt1"/>
+            </a:solidFill>
+            <a:prstDash val="solid"/>
+            <a:miter lim="800000"/>
+            <a:headEnd len="sm" w="sm" type="none"/>
+            <a:tailEnd len="sm" w="sm" type="none"/>
+          </a:ln>
+        </p:spPr>
+        <p:txBody>
+          <a:bodyPr anchorCtr="0" anchor="ctr" bIns="45700" lIns="91425" spcFirstLastPara="1" rIns="91425" wrap="square" tIns="45700">
+            <a:noAutofit/>
+          </a:bodyPr>
+          <a:lstStyle/>
+          <a:p>
+            <a:pPr indent="0" lvl="0" marL="0" marR="0" rtl="0" algn="ctr">
+              <a:spcBef>
+                <a:spcPts val="0"/>
+              </a:spcBef>
+              <a:spcAft>
+                <a:spcPts val="0"/>
+              </a:spcAft>
+              <a:buNone/>
+            </a:pPr>
+            <a:r>
+              <a:t/>
+            </a:r>
+            <a:endParaRPr sz="1800">
+              <a:solidFill>
+                <a:schemeClr val="lt1"/>
+              </a:solidFill>
+              <a:latin typeface="Calibri"/>
+              <a:ea typeface="Calibri"/>
+              <a:cs typeface="Calibri"/>
+              <a:sym typeface="Calibri"/>
+            </a:endParaRPr>
+          </a:p>
+        </p:txBody>
+      </p:sp>
+      <p:pic>
+        <p:nvPicPr>
+          <p:cNvPr descr="Category: Nodes - Euro-BioImaging" id="184" name="Google Shape;184;p7"/>
+          <p:cNvPicPr preferRelativeResize="0"/>
+          <p:nvPr/>
+        </p:nvPicPr>
+        <p:blipFill rotWithShape="1">
+          <a:blip r:embed="rId3">
+            <a:alphaModFix/>
+          </a:blip>
+          <a:srcRect b="34559" l="17216" r="17582" t="7763"/>
+          <a:stretch/>
+        </p:blipFill>
+        <p:spPr>
+          <a:xfrm>
+            <a:off x="10982392" y="93620"/>
+            <a:ext cx="1212396" cy="1075776"/>
+          </a:xfrm>
+          <a:prstGeom prst="rect">
+            <a:avLst/>
+          </a:prstGeom>
+          <a:noFill/>
+          <a:ln>
+            <a:noFill/>
+          </a:ln>
+        </p:spPr>
+      </p:pic>
+      <p:sp>
+        <p:nvSpPr>
+          <p:cNvPr id="185" name="Google Shape;185;p7"/>
+          <p:cNvSpPr/>
+          <p:nvPr/>
+        </p:nvSpPr>
+        <p:spPr>
+          <a:xfrm>
+            <a:off x="4038600" y="6356350"/>
+            <a:ext cx="4114800" cy="365125"/>
+          </a:xfrm>
+          <a:prstGeom prst="rect">
+            <a:avLst/>
+          </a:prstGeom>
+          <a:noFill/>
+          <a:ln>
+            <a:noFill/>
+          </a:ln>
+        </p:spPr>
+        <p:txBody>
+          <a:bodyPr anchorCtr="0" anchor="ctr" bIns="45700" lIns="91425" spcFirstLastPara="1" rIns="91425" wrap="square" tIns="45700">
+            <a:noAutofit/>
+          </a:bodyPr>
+          <a:lstStyle/>
+          <a:p>
+            <a:pPr indent="0" lvl="0" marL="0" marR="0" rtl="0" algn="ctr">
+              <a:spcBef>
+                <a:spcPts val="0"/>
+              </a:spcBef>
+              <a:spcAft>
+                <a:spcPts val="0"/>
+              </a:spcAft>
+              <a:buNone/>
+            </a:pPr>
+            <a:r>
+              <a:rPr lang="it-IT" sz="1200">
+                <a:solidFill>
+                  <a:srgbClr val="888888"/>
+                </a:solidFill>
+                <a:latin typeface="Calibri"/>
+                <a:ea typeface="Calibri"/>
+                <a:cs typeface="Calibri"/>
+                <a:sym typeface="Calibri"/>
+              </a:rPr>
+              <a:t>francesco.gammaraccio@unito.it</a:t>
+            </a:r>
+            <a:endParaRPr sz="1200">
+              <a:solidFill>
+                <a:srgbClr val="888888"/>
+              </a:solidFill>
+              <a:latin typeface="Calibri"/>
+              <a:ea typeface="Calibri"/>
+              <a:cs typeface="Calibri"/>
+              <a:sym typeface="Calibri"/>
+            </a:endParaRPr>
+          </a:p>
+        </p:txBody>
+      </p:sp>
+      <p:sp>
+        <p:nvSpPr>
+          <p:cNvPr id="186" name="Google Shape;186;p7"/>
+          <p:cNvSpPr txBox="1"/>
+          <p:nvPr/>
+        </p:nvSpPr>
+        <p:spPr>
+          <a:xfrm flipH="1" rot="10800000">
+            <a:off x="1606627" y="9910897"/>
+            <a:ext cx="1303664" cy="58909"/>
+          </a:xfrm>
+          <a:prstGeom prst="rect">
+            <a:avLst/>
+          </a:prstGeom>
+          <a:noFill/>
+          <a:ln>
+            <a:noFill/>
+          </a:ln>
+        </p:spPr>
+        <p:txBody>
+          <a:bodyPr anchorCtr="0" anchor="t" bIns="45700" lIns="91425" spcFirstLastPara="1" rIns="91425" wrap="square" tIns="45700">
+            <a:normAutofit fontScale="25000" lnSpcReduction="20000"/>
+          </a:bodyPr>
+          <a:lstStyle/>
+          <a:p>
+            <a:pPr indent="0" lvl="0" marL="0" marR="0" rtl="0" algn="l">
+              <a:spcBef>
+                <a:spcPts val="0"/>
+              </a:spcBef>
+              <a:spcAft>
+                <a:spcPts val="0"/>
+              </a:spcAft>
+              <a:buNone/>
+            </a:pPr>
+            <a:r>
+              <a:rPr lang="it-IT" sz="1800">
+                <a:solidFill>
+                  <a:schemeClr val="dk1"/>
+                </a:solidFill>
+                <a:latin typeface="Calibri"/>
+                <a:ea typeface="Calibri"/>
+                <a:cs typeface="Calibri"/>
+                <a:sym typeface="Calibri"/>
+              </a:rPr>
+              <a:t>ThePhoto di PhotoAuthor è concessa in licenza secondo CCYYSA.</a:t>
+            </a:r>
+            <a:endParaRPr/>
+          </a:p>
+        </p:txBody>
+      </p:sp>
+      <p:sp>
+        <p:nvSpPr>
+          <p:cNvPr id="187" name="Google Shape;187;p7"/>
+          <p:cNvSpPr txBox="1"/>
+          <p:nvPr/>
+        </p:nvSpPr>
+        <p:spPr>
+          <a:xfrm>
+            <a:off x="428047" y="1484820"/>
+            <a:ext cx="10668000" cy="2366939"/>
+          </a:xfrm>
+          <a:prstGeom prst="rect">
+            <a:avLst/>
+          </a:prstGeom>
+          <a:noFill/>
+          <a:ln>
+            <a:noFill/>
+          </a:ln>
+        </p:spPr>
+        <p:txBody>
+          <a:bodyPr anchorCtr="0" anchor="t" bIns="45700" lIns="91425" spcFirstLastPara="1" rIns="91425" wrap="square" tIns="45700">
+            <a:spAutoFit/>
+          </a:bodyPr>
+          <a:lstStyle/>
+          <a:p>
+            <a:pPr indent="0" lvl="0" marL="0" marR="0" rtl="0" algn="just">
+              <a:spcBef>
+                <a:spcPts val="0"/>
+              </a:spcBef>
+              <a:spcAft>
+                <a:spcPts val="0"/>
+              </a:spcAft>
+              <a:buNone/>
+            </a:pPr>
+            <a:r>
+              <a:rPr lang="it-IT" sz="1800">
+                <a:solidFill>
+                  <a:schemeClr val="dk1"/>
+                </a:solidFill>
+                <a:latin typeface="Calibri"/>
+                <a:ea typeface="Calibri"/>
+                <a:cs typeface="Calibri"/>
+                <a:sym typeface="Calibri"/>
+              </a:rPr>
+              <a:t>The capability of XNAT to manage different imaging data structures has been expanded to manage longitudinal studies with multiple timepoints, treatment procedures involving control and treated groups, and drug administrations with varying doses by using Custom Forms. </a:t>
+            </a:r>
+            <a:endParaRPr sz="1800">
+              <a:solidFill>
+                <a:schemeClr val="dk1"/>
+              </a:solidFill>
+              <a:latin typeface="Calibri"/>
+              <a:ea typeface="Calibri"/>
+              <a:cs typeface="Calibri"/>
+              <a:sym typeface="Calibri"/>
+            </a:endParaRPr>
+          </a:p>
+          <a:p>
+            <a:pPr indent="0" lvl="0" marL="0" marR="0" rtl="0" algn="just">
+              <a:spcBef>
+                <a:spcPts val="0"/>
+              </a:spcBef>
+              <a:spcAft>
+                <a:spcPts val="0"/>
+              </a:spcAft>
+              <a:buNone/>
+            </a:pPr>
+            <a:r>
+              <a:t/>
+            </a:r>
+            <a:endParaRPr sz="1800">
+              <a:solidFill>
+                <a:schemeClr val="dk1"/>
+              </a:solidFill>
+              <a:latin typeface="Calibri"/>
+              <a:ea typeface="Calibri"/>
+              <a:cs typeface="Calibri"/>
+              <a:sym typeface="Calibri"/>
+            </a:endParaRPr>
+          </a:p>
+          <a:p>
+            <a:pPr indent="0" lvl="0" marL="0" marR="0" rtl="0" algn="just">
+              <a:spcBef>
+                <a:spcPts val="0"/>
+              </a:spcBef>
+              <a:spcAft>
+                <a:spcPts val="0"/>
+              </a:spcAft>
+              <a:buNone/>
+            </a:pPr>
+            <a:r>
+              <a:t/>
+            </a:r>
+            <a:endParaRPr sz="1800">
+              <a:solidFill>
+                <a:schemeClr val="dk1"/>
+              </a:solidFill>
+              <a:latin typeface="Calibri"/>
+              <a:ea typeface="Calibri"/>
+              <a:cs typeface="Calibri"/>
+              <a:sym typeface="Calibri"/>
+            </a:endParaRPr>
+          </a:p>
+          <a:p>
+            <a:pPr indent="0" lvl="0" marL="0" marR="0" rtl="0" algn="just">
+              <a:spcBef>
+                <a:spcPts val="0"/>
+              </a:spcBef>
+              <a:spcAft>
+                <a:spcPts val="0"/>
+              </a:spcAft>
+              <a:buNone/>
+            </a:pPr>
+            <a:r>
+              <a:t/>
+            </a:r>
+            <a:endParaRPr sz="1800">
+              <a:solidFill>
+                <a:schemeClr val="dk1"/>
+              </a:solidFill>
+              <a:latin typeface="Calibri"/>
+              <a:ea typeface="Calibri"/>
+              <a:cs typeface="Calibri"/>
+              <a:sym typeface="Calibri"/>
+            </a:endParaRPr>
+          </a:p>
+          <a:p>
+            <a:pPr indent="0" lvl="0" marL="0" marR="0" rtl="0" algn="l">
+              <a:spcBef>
+                <a:spcPts val="0"/>
+              </a:spcBef>
+              <a:spcAft>
+                <a:spcPts val="0"/>
+              </a:spcAft>
+              <a:buNone/>
+            </a:pPr>
+            <a:r>
+              <a:t/>
+            </a:r>
+            <a:endParaRPr sz="1800">
+              <a:solidFill>
+                <a:schemeClr val="dk1"/>
+              </a:solidFill>
+              <a:latin typeface="Calibri"/>
+              <a:ea typeface="Calibri"/>
+              <a:cs typeface="Calibri"/>
+              <a:sym typeface="Calibri"/>
+            </a:endParaRPr>
+          </a:p>
+          <a:p>
+            <a:pPr indent="0" lvl="0" marL="0" marR="0" rtl="0" algn="ctr">
+              <a:spcBef>
+                <a:spcPts val="0"/>
+              </a:spcBef>
+              <a:spcAft>
+                <a:spcPts val="0"/>
+              </a:spcAft>
+              <a:buNone/>
+            </a:pPr>
+            <a:r>
+              <a:t/>
+            </a:r>
+            <a:endParaRPr sz="1800">
+              <a:solidFill>
+                <a:schemeClr val="dk1"/>
+              </a:solidFill>
+              <a:latin typeface="Calibri"/>
+              <a:ea typeface="Calibri"/>
+              <a:cs typeface="Calibri"/>
+              <a:sym typeface="Calibri"/>
+            </a:endParaRPr>
+          </a:p>
+        </p:txBody>
+      </p:sp>
+      <p:pic>
+        <p:nvPicPr>
+          <p:cNvPr descr="Immagine che contiene testo, schermata, numero, Carattere&#10;&#10;Il contenuto generato dall&amp;#39;IA potrebbe non essere corretto." id="188" name="Google Shape;188;p7"/>
+          <p:cNvPicPr preferRelativeResize="0"/>
+          <p:nvPr/>
+        </p:nvPicPr>
+        <p:blipFill rotWithShape="1">
+          <a:blip r:embed="rId4">
+            <a:alphaModFix/>
+          </a:blip>
+          <a:srcRect b="0" l="0" r="0" t="0"/>
+          <a:stretch/>
+        </p:blipFill>
+        <p:spPr>
+          <a:xfrm>
+            <a:off x="564906" y="2860431"/>
+            <a:ext cx="10991850" cy="1981200"/>
+          </a:xfrm>
+          <a:prstGeom prst="rect">
+            <a:avLst/>
+          </a:prstGeom>
+          <a:noFill/>
+          <a:ln>
+            <a:noFill/>
+          </a:ln>
+        </p:spPr>
+      </p:pic>
+      <p:sp>
+        <p:nvSpPr>
+          <p:cNvPr id="189" name="Google Shape;189;p7"/>
+          <p:cNvSpPr/>
+          <p:nvPr/>
+        </p:nvSpPr>
+        <p:spPr>
+          <a:xfrm>
+            <a:off x="7291755" y="3856892"/>
+            <a:ext cx="3915508" cy="820616"/>
+          </a:xfrm>
+          <a:prstGeom prst="roundRect">
+            <a:avLst>
+              <a:gd fmla="val 16667" name="adj"/>
+            </a:avLst>
+          </a:prstGeom>
+          <a:noFill/>
+          <a:ln cap="flat" cmpd="sng" w="12700">
+            <a:solidFill>
+              <a:srgbClr val="233E6B"/>
+            </a:solidFill>
+            <a:prstDash val="solid"/>
+            <a:miter lim="800000"/>
+            <a:headEnd len="sm" w="sm" type="none"/>
+            <a:tailEnd len="sm" w="sm" type="none"/>
+          </a:ln>
+        </p:spPr>
+        <p:txBody>
+          <a:bodyPr anchorCtr="0" anchor="ctr" bIns="45700" lIns="91425" spcFirstLastPara="1" rIns="91425" wrap="square" tIns="45700">
+            <a:noAutofit/>
+          </a:bodyPr>
+          <a:lstStyle/>
+          <a:p>
+            <a:pPr indent="0" lvl="0" marL="0" marR="0" rtl="0" algn="ctr">
+              <a:spcBef>
+                <a:spcPts val="0"/>
+              </a:spcBef>
+              <a:spcAft>
+                <a:spcPts val="0"/>
+              </a:spcAft>
+              <a:buNone/>
+            </a:pPr>
+            <a:r>
+              <a:t/>
+            </a:r>
+            <a:endParaRPr sz="1800">
+              <a:solidFill>
+                <a:schemeClr val="lt1"/>
+              </a:solidFill>
+              <a:latin typeface="Calibri"/>
+              <a:ea typeface="Calibri"/>
+              <a:cs typeface="Calibri"/>
+              <a:sym typeface="Calibri"/>
+            </a:endParaRPr>
+          </a:p>
+        </p:txBody>
+      </p:sp>
     </p:spTree>
   </p:cSld>
   <p:clrMapOvr>
